--- a/public/videos/repositories/retro-new-games/retro-new-games-tech-preview.pptx
+++ b/public/videos/repositories/retro-new-games/retro-new-games-tech-preview.pptx
@@ -134,7 +134,7 @@
           <p:cNvPr id="2" name="タイトル 1">
             <a:extLst>
               <a:ext uri="{FF2B5EF4-FFF2-40B4-BE49-F238E27FC236}">
-                <a16:creationId xmlns:a16="http://schemas.microsoft.com/office/drawing/2014/main" id="{6A2FA555-6BD5-89F6-5E51-5A7069D737CE}"/>
+                <a16:creationId xmlns:a16="http://schemas.microsoft.com/office/drawing/2014/main" id="{F3336962-E500-A196-200E-EC7E1BB17770}"/>
               </a:ext>
             </a:extLst>
           </p:cNvPr>
@@ -171,7 +171,7 @@
           <p:cNvPr id="3" name="字幕 2">
             <a:extLst>
               <a:ext uri="{FF2B5EF4-FFF2-40B4-BE49-F238E27FC236}">
-                <a16:creationId xmlns:a16="http://schemas.microsoft.com/office/drawing/2014/main" id="{B9FA8498-1562-A19D-E3D9-7D7B7D4ABE10}"/>
+                <a16:creationId xmlns:a16="http://schemas.microsoft.com/office/drawing/2014/main" id="{24954447-F8CA-0F74-2CD2-984FAFC78D29}"/>
               </a:ext>
             </a:extLst>
           </p:cNvPr>
@@ -241,7 +241,7 @@
           <p:cNvPr id="4" name="日付プレースホルダー 3">
             <a:extLst>
               <a:ext uri="{FF2B5EF4-FFF2-40B4-BE49-F238E27FC236}">
-                <a16:creationId xmlns:a16="http://schemas.microsoft.com/office/drawing/2014/main" id="{000361B8-6203-C2C8-1335-A0DA045D743C}"/>
+                <a16:creationId xmlns:a16="http://schemas.microsoft.com/office/drawing/2014/main" id="{DD5782CF-DC6B-6624-F616-29AD7F753716}"/>
               </a:ext>
             </a:extLst>
           </p:cNvPr>
@@ -257,7 +257,7 @@
           <a:bodyPr/>
           <a:lstStyle/>
           <a:p>
-            <a:fld id="{B6A0002B-A49C-46A7-A423-AE5335FBDEEF}" type="datetimeFigureOut">
+            <a:fld id="{F4A6FCA5-62B8-4C15-9D32-6B3F5DFC80E5}" type="datetimeFigureOut">
               <a:rPr kumimoji="1" lang="ja-JP" altLang="en-US" smtClean="0"/>
               <a:t>2026/7/30</a:t>
             </a:fld>
@@ -270,7 +270,7 @@
           <p:cNvPr id="5" name="フッター プレースホルダー 4">
             <a:extLst>
               <a:ext uri="{FF2B5EF4-FFF2-40B4-BE49-F238E27FC236}">
-                <a16:creationId xmlns:a16="http://schemas.microsoft.com/office/drawing/2014/main" id="{C79D1A50-5034-EA37-0D75-B7E069DD87FF}"/>
+                <a16:creationId xmlns:a16="http://schemas.microsoft.com/office/drawing/2014/main" id="{A5AFA818-3F2D-2FAA-A04B-AF1B4FF34541}"/>
               </a:ext>
             </a:extLst>
           </p:cNvPr>
@@ -295,7 +295,7 @@
           <p:cNvPr id="6" name="スライド番号プレースホルダー 5">
             <a:extLst>
               <a:ext uri="{FF2B5EF4-FFF2-40B4-BE49-F238E27FC236}">
-                <a16:creationId xmlns:a16="http://schemas.microsoft.com/office/drawing/2014/main" id="{6C501FB5-5090-EB5B-F8F2-28B5330BBE10}"/>
+                <a16:creationId xmlns:a16="http://schemas.microsoft.com/office/drawing/2014/main" id="{25B2F278-F04D-068A-AFC3-472523AAA0AA}"/>
               </a:ext>
             </a:extLst>
           </p:cNvPr>
@@ -311,7 +311,7 @@
           <a:bodyPr/>
           <a:lstStyle/>
           <a:p>
-            <a:fld id="{15A37593-B8CC-4303-A635-0E45314FF835}" type="slidenum">
+            <a:fld id="{A096E928-4380-45D7-850F-B5D9F1E18264}" type="slidenum">
               <a:rPr kumimoji="1" lang="ja-JP" altLang="en-US" smtClean="0"/>
               <a:t>‹#›</a:t>
             </a:fld>
@@ -322,7 +322,7 @@
     </p:spTree>
     <p:extLst>
       <p:ext uri="{BB962C8B-B14F-4D97-AF65-F5344CB8AC3E}">
-        <p14:creationId xmlns:p14="http://schemas.microsoft.com/office/powerpoint/2010/main" val="4015664485"/>
+        <p14:creationId xmlns:p14="http://schemas.microsoft.com/office/powerpoint/2010/main" val="2425956508"/>
       </p:ext>
     </p:extLst>
   </p:cSld>
@@ -354,7 +354,7 @@
           <p:cNvPr id="2" name="タイトル 1">
             <a:extLst>
               <a:ext uri="{FF2B5EF4-FFF2-40B4-BE49-F238E27FC236}">
-                <a16:creationId xmlns:a16="http://schemas.microsoft.com/office/drawing/2014/main" id="{F634C6DC-9985-BCB5-66C1-B55AD9330F54}"/>
+                <a16:creationId xmlns:a16="http://schemas.microsoft.com/office/drawing/2014/main" id="{7670AA0E-4C3F-A70E-EEE5-55CB1AF84B0C}"/>
               </a:ext>
             </a:extLst>
           </p:cNvPr>
@@ -382,7 +382,7 @@
           <p:cNvPr id="3" name="縦書きテキスト プレースホルダー 2">
             <a:extLst>
               <a:ext uri="{FF2B5EF4-FFF2-40B4-BE49-F238E27FC236}">
-                <a16:creationId xmlns:a16="http://schemas.microsoft.com/office/drawing/2014/main" id="{D6777639-3942-D932-847E-5D0B4AE76AC2}"/>
+                <a16:creationId xmlns:a16="http://schemas.microsoft.com/office/drawing/2014/main" id="{C4AC5F3C-6B74-DFD7-BB7B-9AE9CC811319}"/>
               </a:ext>
             </a:extLst>
           </p:cNvPr>
@@ -471,7 +471,7 @@
           <p:cNvPr id="4" name="日付プレースホルダー 3">
             <a:extLst>
               <a:ext uri="{FF2B5EF4-FFF2-40B4-BE49-F238E27FC236}">
-                <a16:creationId xmlns:a16="http://schemas.microsoft.com/office/drawing/2014/main" id="{4C0886BB-3D06-499F-3FE9-4FA48F34F239}"/>
+                <a16:creationId xmlns:a16="http://schemas.microsoft.com/office/drawing/2014/main" id="{6B7F0839-FA1C-8EA5-5874-21DBE7BA1EAA}"/>
               </a:ext>
             </a:extLst>
           </p:cNvPr>
@@ -487,7 +487,7 @@
           <a:bodyPr/>
           <a:lstStyle/>
           <a:p>
-            <a:fld id="{B6A0002B-A49C-46A7-A423-AE5335FBDEEF}" type="datetimeFigureOut">
+            <a:fld id="{F4A6FCA5-62B8-4C15-9D32-6B3F5DFC80E5}" type="datetimeFigureOut">
               <a:rPr kumimoji="1" lang="ja-JP" altLang="en-US" smtClean="0"/>
               <a:t>2026/7/30</a:t>
             </a:fld>
@@ -500,7 +500,7 @@
           <p:cNvPr id="5" name="フッター プレースホルダー 4">
             <a:extLst>
               <a:ext uri="{FF2B5EF4-FFF2-40B4-BE49-F238E27FC236}">
-                <a16:creationId xmlns:a16="http://schemas.microsoft.com/office/drawing/2014/main" id="{C7E6BB7C-A21F-5AAD-C92F-B627F0D93864}"/>
+                <a16:creationId xmlns:a16="http://schemas.microsoft.com/office/drawing/2014/main" id="{C0AFF0CD-9B74-EAA5-E28F-EECD9FB31A81}"/>
               </a:ext>
             </a:extLst>
           </p:cNvPr>
@@ -525,7 +525,7 @@
           <p:cNvPr id="6" name="スライド番号プレースホルダー 5">
             <a:extLst>
               <a:ext uri="{FF2B5EF4-FFF2-40B4-BE49-F238E27FC236}">
-                <a16:creationId xmlns:a16="http://schemas.microsoft.com/office/drawing/2014/main" id="{6F98B6D2-2777-5564-0AC6-BC076AC53417}"/>
+                <a16:creationId xmlns:a16="http://schemas.microsoft.com/office/drawing/2014/main" id="{2A8542E1-CD60-52C8-12AE-B1614D98C964}"/>
               </a:ext>
             </a:extLst>
           </p:cNvPr>
@@ -541,7 +541,7 @@
           <a:bodyPr/>
           <a:lstStyle/>
           <a:p>
-            <a:fld id="{15A37593-B8CC-4303-A635-0E45314FF835}" type="slidenum">
+            <a:fld id="{A096E928-4380-45D7-850F-B5D9F1E18264}" type="slidenum">
               <a:rPr kumimoji="1" lang="ja-JP" altLang="en-US" smtClean="0"/>
               <a:t>‹#›</a:t>
             </a:fld>
@@ -552,7 +552,7 @@
     </p:spTree>
     <p:extLst>
       <p:ext uri="{BB962C8B-B14F-4D97-AF65-F5344CB8AC3E}">
-        <p14:creationId xmlns:p14="http://schemas.microsoft.com/office/powerpoint/2010/main" val="3652452312"/>
+        <p14:creationId xmlns:p14="http://schemas.microsoft.com/office/powerpoint/2010/main" val="2538297500"/>
       </p:ext>
     </p:extLst>
   </p:cSld>
@@ -584,7 +584,7 @@
           <p:cNvPr id="2" name="縦書きタイトル 1">
             <a:extLst>
               <a:ext uri="{FF2B5EF4-FFF2-40B4-BE49-F238E27FC236}">
-                <a16:creationId xmlns:a16="http://schemas.microsoft.com/office/drawing/2014/main" id="{63D06899-B564-B321-3696-100F88522497}"/>
+                <a16:creationId xmlns:a16="http://schemas.microsoft.com/office/drawing/2014/main" id="{2EEA9500-ECE6-BEB7-0E92-85E226CC8086}"/>
               </a:ext>
             </a:extLst>
           </p:cNvPr>
@@ -617,7 +617,7 @@
           <p:cNvPr id="3" name="縦書きテキスト プレースホルダー 2">
             <a:extLst>
               <a:ext uri="{FF2B5EF4-FFF2-40B4-BE49-F238E27FC236}">
-                <a16:creationId xmlns:a16="http://schemas.microsoft.com/office/drawing/2014/main" id="{A3F619FA-BF9B-56A8-E8AE-FD267682BE91}"/>
+                <a16:creationId xmlns:a16="http://schemas.microsoft.com/office/drawing/2014/main" id="{BF1E0BE4-EC95-512E-63FF-AA7EE96377DF}"/>
               </a:ext>
             </a:extLst>
           </p:cNvPr>
@@ -711,7 +711,7 @@
           <p:cNvPr id="4" name="日付プレースホルダー 3">
             <a:extLst>
               <a:ext uri="{FF2B5EF4-FFF2-40B4-BE49-F238E27FC236}">
-                <a16:creationId xmlns:a16="http://schemas.microsoft.com/office/drawing/2014/main" id="{1EE58771-F984-190E-4C2E-019A9D1FAE81}"/>
+                <a16:creationId xmlns:a16="http://schemas.microsoft.com/office/drawing/2014/main" id="{91524E6A-1354-29D4-0742-E66844E2AF53}"/>
               </a:ext>
             </a:extLst>
           </p:cNvPr>
@@ -727,7 +727,7 @@
           <a:bodyPr/>
           <a:lstStyle/>
           <a:p>
-            <a:fld id="{B6A0002B-A49C-46A7-A423-AE5335FBDEEF}" type="datetimeFigureOut">
+            <a:fld id="{F4A6FCA5-62B8-4C15-9D32-6B3F5DFC80E5}" type="datetimeFigureOut">
               <a:rPr kumimoji="1" lang="ja-JP" altLang="en-US" smtClean="0"/>
               <a:t>2026/7/30</a:t>
             </a:fld>
@@ -740,7 +740,7 @@
           <p:cNvPr id="5" name="フッター プレースホルダー 4">
             <a:extLst>
               <a:ext uri="{FF2B5EF4-FFF2-40B4-BE49-F238E27FC236}">
-                <a16:creationId xmlns:a16="http://schemas.microsoft.com/office/drawing/2014/main" id="{5F067376-0449-0A3B-D9AC-7879EE48394F}"/>
+                <a16:creationId xmlns:a16="http://schemas.microsoft.com/office/drawing/2014/main" id="{416AA559-BBE1-99CD-9518-CE52D9088E05}"/>
               </a:ext>
             </a:extLst>
           </p:cNvPr>
@@ -765,7 +765,7 @@
           <p:cNvPr id="6" name="スライド番号プレースホルダー 5">
             <a:extLst>
               <a:ext uri="{FF2B5EF4-FFF2-40B4-BE49-F238E27FC236}">
-                <a16:creationId xmlns:a16="http://schemas.microsoft.com/office/drawing/2014/main" id="{C12BE8B6-0565-4385-A2EA-CB15E0A0EBDA}"/>
+                <a16:creationId xmlns:a16="http://schemas.microsoft.com/office/drawing/2014/main" id="{56C6429B-34F7-F43D-A648-4FA9281DB6ED}"/>
               </a:ext>
             </a:extLst>
           </p:cNvPr>
@@ -781,7 +781,7 @@
           <a:bodyPr/>
           <a:lstStyle/>
           <a:p>
-            <a:fld id="{15A37593-B8CC-4303-A635-0E45314FF835}" type="slidenum">
+            <a:fld id="{A096E928-4380-45D7-850F-B5D9F1E18264}" type="slidenum">
               <a:rPr kumimoji="1" lang="ja-JP" altLang="en-US" smtClean="0"/>
               <a:t>‹#›</a:t>
             </a:fld>
@@ -792,7 +792,7 @@
     </p:spTree>
     <p:extLst>
       <p:ext uri="{BB962C8B-B14F-4D97-AF65-F5344CB8AC3E}">
-        <p14:creationId xmlns:p14="http://schemas.microsoft.com/office/powerpoint/2010/main" val="43048798"/>
+        <p14:creationId xmlns:p14="http://schemas.microsoft.com/office/powerpoint/2010/main" val="1163801883"/>
       </p:ext>
     </p:extLst>
   </p:cSld>
@@ -824,7 +824,7 @@
           <p:cNvPr id="2" name="タイトル 1">
             <a:extLst>
               <a:ext uri="{FF2B5EF4-FFF2-40B4-BE49-F238E27FC236}">
-                <a16:creationId xmlns:a16="http://schemas.microsoft.com/office/drawing/2014/main" id="{B730C284-FE27-2F82-1525-82B46F352842}"/>
+                <a16:creationId xmlns:a16="http://schemas.microsoft.com/office/drawing/2014/main" id="{21390F2F-CAF8-9ECC-3E0D-7DB461DE668C}"/>
               </a:ext>
             </a:extLst>
           </p:cNvPr>
@@ -852,7 +852,7 @@
           <p:cNvPr id="3" name="コンテンツ プレースホルダー 2">
             <a:extLst>
               <a:ext uri="{FF2B5EF4-FFF2-40B4-BE49-F238E27FC236}">
-                <a16:creationId xmlns:a16="http://schemas.microsoft.com/office/drawing/2014/main" id="{8D559828-4672-DA76-4F5A-5C62637EBD83}"/>
+                <a16:creationId xmlns:a16="http://schemas.microsoft.com/office/drawing/2014/main" id="{829E348B-12A3-90CB-10DF-8E64011F29BA}"/>
               </a:ext>
             </a:extLst>
           </p:cNvPr>
@@ -941,7 +941,7 @@
           <p:cNvPr id="4" name="日付プレースホルダー 3">
             <a:extLst>
               <a:ext uri="{FF2B5EF4-FFF2-40B4-BE49-F238E27FC236}">
-                <a16:creationId xmlns:a16="http://schemas.microsoft.com/office/drawing/2014/main" id="{572D50A2-A872-F95F-068D-CB082C089A74}"/>
+                <a16:creationId xmlns:a16="http://schemas.microsoft.com/office/drawing/2014/main" id="{7012505D-1408-4C40-09D0-72EAF58284B7}"/>
               </a:ext>
             </a:extLst>
           </p:cNvPr>
@@ -957,7 +957,7 @@
           <a:bodyPr/>
           <a:lstStyle/>
           <a:p>
-            <a:fld id="{B6A0002B-A49C-46A7-A423-AE5335FBDEEF}" type="datetimeFigureOut">
+            <a:fld id="{F4A6FCA5-62B8-4C15-9D32-6B3F5DFC80E5}" type="datetimeFigureOut">
               <a:rPr kumimoji="1" lang="ja-JP" altLang="en-US" smtClean="0"/>
               <a:t>2026/7/30</a:t>
             </a:fld>
@@ -970,7 +970,7 @@
           <p:cNvPr id="5" name="フッター プレースホルダー 4">
             <a:extLst>
               <a:ext uri="{FF2B5EF4-FFF2-40B4-BE49-F238E27FC236}">
-                <a16:creationId xmlns:a16="http://schemas.microsoft.com/office/drawing/2014/main" id="{20E8197A-B071-64C9-AB55-EB6EF4B6AF21}"/>
+                <a16:creationId xmlns:a16="http://schemas.microsoft.com/office/drawing/2014/main" id="{771F23B1-DC88-B8E7-E5DA-670ECCF168AB}"/>
               </a:ext>
             </a:extLst>
           </p:cNvPr>
@@ -995,7 +995,7 @@
           <p:cNvPr id="6" name="スライド番号プレースホルダー 5">
             <a:extLst>
               <a:ext uri="{FF2B5EF4-FFF2-40B4-BE49-F238E27FC236}">
-                <a16:creationId xmlns:a16="http://schemas.microsoft.com/office/drawing/2014/main" id="{74373597-AE0F-0EC6-5911-9A8C9B300587}"/>
+                <a16:creationId xmlns:a16="http://schemas.microsoft.com/office/drawing/2014/main" id="{9C8C588A-1990-8115-325E-2EAE28166955}"/>
               </a:ext>
             </a:extLst>
           </p:cNvPr>
@@ -1011,7 +1011,7 @@
           <a:bodyPr/>
           <a:lstStyle/>
           <a:p>
-            <a:fld id="{15A37593-B8CC-4303-A635-0E45314FF835}" type="slidenum">
+            <a:fld id="{A096E928-4380-45D7-850F-B5D9F1E18264}" type="slidenum">
               <a:rPr kumimoji="1" lang="ja-JP" altLang="en-US" smtClean="0"/>
               <a:t>‹#›</a:t>
             </a:fld>
@@ -1022,7 +1022,7 @@
     </p:spTree>
     <p:extLst>
       <p:ext uri="{BB962C8B-B14F-4D97-AF65-F5344CB8AC3E}">
-        <p14:creationId xmlns:p14="http://schemas.microsoft.com/office/powerpoint/2010/main" val="1548427485"/>
+        <p14:creationId xmlns:p14="http://schemas.microsoft.com/office/powerpoint/2010/main" val="1192361832"/>
       </p:ext>
     </p:extLst>
   </p:cSld>
@@ -1054,7 +1054,7 @@
           <p:cNvPr id="2" name="タイトル 1">
             <a:extLst>
               <a:ext uri="{FF2B5EF4-FFF2-40B4-BE49-F238E27FC236}">
-                <a16:creationId xmlns:a16="http://schemas.microsoft.com/office/drawing/2014/main" id="{F1AE006C-D668-6AA0-9CBE-6228E52C8C84}"/>
+                <a16:creationId xmlns:a16="http://schemas.microsoft.com/office/drawing/2014/main" id="{7E42EF2B-ED40-AF81-11FE-DEE3C79F0658}"/>
               </a:ext>
             </a:extLst>
           </p:cNvPr>
@@ -1091,7 +1091,7 @@
           <p:cNvPr id="3" name="テキスト プレースホルダー 2">
             <a:extLst>
               <a:ext uri="{FF2B5EF4-FFF2-40B4-BE49-F238E27FC236}">
-                <a16:creationId xmlns:a16="http://schemas.microsoft.com/office/drawing/2014/main" id="{1F11F6CD-1910-8D84-A804-5C1D22D06785}"/>
+                <a16:creationId xmlns:a16="http://schemas.microsoft.com/office/drawing/2014/main" id="{DE7A04EE-22F2-05AE-FB86-B24A48FF5861}"/>
               </a:ext>
             </a:extLst>
           </p:cNvPr>
@@ -1216,7 +1216,7 @@
           <p:cNvPr id="4" name="日付プレースホルダー 3">
             <a:extLst>
               <a:ext uri="{FF2B5EF4-FFF2-40B4-BE49-F238E27FC236}">
-                <a16:creationId xmlns:a16="http://schemas.microsoft.com/office/drawing/2014/main" id="{678480C4-B4A4-0FB8-3D9A-71C1416FFCEB}"/>
+                <a16:creationId xmlns:a16="http://schemas.microsoft.com/office/drawing/2014/main" id="{5E83DA3B-EAED-2218-22C5-9214CC786DE3}"/>
               </a:ext>
             </a:extLst>
           </p:cNvPr>
@@ -1232,7 +1232,7 @@
           <a:bodyPr/>
           <a:lstStyle/>
           <a:p>
-            <a:fld id="{B6A0002B-A49C-46A7-A423-AE5335FBDEEF}" type="datetimeFigureOut">
+            <a:fld id="{F4A6FCA5-62B8-4C15-9D32-6B3F5DFC80E5}" type="datetimeFigureOut">
               <a:rPr kumimoji="1" lang="ja-JP" altLang="en-US" smtClean="0"/>
               <a:t>2026/7/30</a:t>
             </a:fld>
@@ -1245,7 +1245,7 @@
           <p:cNvPr id="5" name="フッター プレースホルダー 4">
             <a:extLst>
               <a:ext uri="{FF2B5EF4-FFF2-40B4-BE49-F238E27FC236}">
-                <a16:creationId xmlns:a16="http://schemas.microsoft.com/office/drawing/2014/main" id="{105CD547-DB42-AA36-0236-542124D6DC31}"/>
+                <a16:creationId xmlns:a16="http://schemas.microsoft.com/office/drawing/2014/main" id="{74AFE962-C0A0-4CEE-2355-704A338080AF}"/>
               </a:ext>
             </a:extLst>
           </p:cNvPr>
@@ -1270,7 +1270,7 @@
           <p:cNvPr id="6" name="スライド番号プレースホルダー 5">
             <a:extLst>
               <a:ext uri="{FF2B5EF4-FFF2-40B4-BE49-F238E27FC236}">
-                <a16:creationId xmlns:a16="http://schemas.microsoft.com/office/drawing/2014/main" id="{80F60CEB-93FE-5CEC-8BF2-270E51160A0F}"/>
+                <a16:creationId xmlns:a16="http://schemas.microsoft.com/office/drawing/2014/main" id="{ADB130A8-81DE-2B05-3A14-242A9DE37A33}"/>
               </a:ext>
             </a:extLst>
           </p:cNvPr>
@@ -1286,7 +1286,7 @@
           <a:bodyPr/>
           <a:lstStyle/>
           <a:p>
-            <a:fld id="{15A37593-B8CC-4303-A635-0E45314FF835}" type="slidenum">
+            <a:fld id="{A096E928-4380-45D7-850F-B5D9F1E18264}" type="slidenum">
               <a:rPr kumimoji="1" lang="ja-JP" altLang="en-US" smtClean="0"/>
               <a:t>‹#›</a:t>
             </a:fld>
@@ -1297,7 +1297,7 @@
     </p:spTree>
     <p:extLst>
       <p:ext uri="{BB962C8B-B14F-4D97-AF65-F5344CB8AC3E}">
-        <p14:creationId xmlns:p14="http://schemas.microsoft.com/office/powerpoint/2010/main" val="3984532859"/>
+        <p14:creationId xmlns:p14="http://schemas.microsoft.com/office/powerpoint/2010/main" val="3095001460"/>
       </p:ext>
     </p:extLst>
   </p:cSld>
@@ -1329,7 +1329,7 @@
           <p:cNvPr id="2" name="タイトル 1">
             <a:extLst>
               <a:ext uri="{FF2B5EF4-FFF2-40B4-BE49-F238E27FC236}">
-                <a16:creationId xmlns:a16="http://schemas.microsoft.com/office/drawing/2014/main" id="{2345849F-8AD1-4225-9F64-65E5C0A75FE9}"/>
+                <a16:creationId xmlns:a16="http://schemas.microsoft.com/office/drawing/2014/main" id="{18B85953-7B5A-4E4E-B3ED-6865519125CC}"/>
               </a:ext>
             </a:extLst>
           </p:cNvPr>
@@ -1357,7 +1357,7 @@
           <p:cNvPr id="3" name="コンテンツ プレースホルダー 2">
             <a:extLst>
               <a:ext uri="{FF2B5EF4-FFF2-40B4-BE49-F238E27FC236}">
-                <a16:creationId xmlns:a16="http://schemas.microsoft.com/office/drawing/2014/main" id="{610673FF-8A58-C5EE-CD98-D1C1879396F3}"/>
+                <a16:creationId xmlns:a16="http://schemas.microsoft.com/office/drawing/2014/main" id="{9D5A811A-4FF8-A973-0A11-691C02E5F590}"/>
               </a:ext>
             </a:extLst>
           </p:cNvPr>
@@ -1451,7 +1451,7 @@
           <p:cNvPr id="4" name="コンテンツ プレースホルダー 3">
             <a:extLst>
               <a:ext uri="{FF2B5EF4-FFF2-40B4-BE49-F238E27FC236}">
-                <a16:creationId xmlns:a16="http://schemas.microsoft.com/office/drawing/2014/main" id="{C0CF8840-548A-5FC9-B4E1-843C2C9A67D5}"/>
+                <a16:creationId xmlns:a16="http://schemas.microsoft.com/office/drawing/2014/main" id="{C87C375D-FF60-D7CB-D215-D96E610FD378}"/>
               </a:ext>
             </a:extLst>
           </p:cNvPr>
@@ -1545,7 +1545,7 @@
           <p:cNvPr id="5" name="日付プレースホルダー 4">
             <a:extLst>
               <a:ext uri="{FF2B5EF4-FFF2-40B4-BE49-F238E27FC236}">
-                <a16:creationId xmlns:a16="http://schemas.microsoft.com/office/drawing/2014/main" id="{FF731D98-5797-8268-F1ED-EFDEB37A903B}"/>
+                <a16:creationId xmlns:a16="http://schemas.microsoft.com/office/drawing/2014/main" id="{7B76AFFE-3B35-047A-3D9C-A7071D70A9E6}"/>
               </a:ext>
             </a:extLst>
           </p:cNvPr>
@@ -1561,7 +1561,7 @@
           <a:bodyPr/>
           <a:lstStyle/>
           <a:p>
-            <a:fld id="{B6A0002B-A49C-46A7-A423-AE5335FBDEEF}" type="datetimeFigureOut">
+            <a:fld id="{F4A6FCA5-62B8-4C15-9D32-6B3F5DFC80E5}" type="datetimeFigureOut">
               <a:rPr kumimoji="1" lang="ja-JP" altLang="en-US" smtClean="0"/>
               <a:t>2026/7/30</a:t>
             </a:fld>
@@ -1574,7 +1574,7 @@
           <p:cNvPr id="6" name="フッター プレースホルダー 5">
             <a:extLst>
               <a:ext uri="{FF2B5EF4-FFF2-40B4-BE49-F238E27FC236}">
-                <a16:creationId xmlns:a16="http://schemas.microsoft.com/office/drawing/2014/main" id="{6D6843E4-9971-61EC-2DB7-8764F3A24997}"/>
+                <a16:creationId xmlns:a16="http://schemas.microsoft.com/office/drawing/2014/main" id="{4B04FD92-F6DA-1575-4EFF-FAD4BEEB6AA0}"/>
               </a:ext>
             </a:extLst>
           </p:cNvPr>
@@ -1599,7 +1599,7 @@
           <p:cNvPr id="7" name="スライド番号プレースホルダー 6">
             <a:extLst>
               <a:ext uri="{FF2B5EF4-FFF2-40B4-BE49-F238E27FC236}">
-                <a16:creationId xmlns:a16="http://schemas.microsoft.com/office/drawing/2014/main" id="{13CB9805-0D67-F1CD-D881-E28AB4A9524E}"/>
+                <a16:creationId xmlns:a16="http://schemas.microsoft.com/office/drawing/2014/main" id="{4D423773-0CF5-B794-69E1-6E111B638F57}"/>
               </a:ext>
             </a:extLst>
           </p:cNvPr>
@@ -1615,7 +1615,7 @@
           <a:bodyPr/>
           <a:lstStyle/>
           <a:p>
-            <a:fld id="{15A37593-B8CC-4303-A635-0E45314FF835}" type="slidenum">
+            <a:fld id="{A096E928-4380-45D7-850F-B5D9F1E18264}" type="slidenum">
               <a:rPr kumimoji="1" lang="ja-JP" altLang="en-US" smtClean="0"/>
               <a:t>‹#›</a:t>
             </a:fld>
@@ -1626,7 +1626,7 @@
     </p:spTree>
     <p:extLst>
       <p:ext uri="{BB962C8B-B14F-4D97-AF65-F5344CB8AC3E}">
-        <p14:creationId xmlns:p14="http://schemas.microsoft.com/office/powerpoint/2010/main" val="3996559647"/>
+        <p14:creationId xmlns:p14="http://schemas.microsoft.com/office/powerpoint/2010/main" val="3691235660"/>
       </p:ext>
     </p:extLst>
   </p:cSld>
@@ -1658,7 +1658,7 @@
           <p:cNvPr id="2" name="タイトル 1">
             <a:extLst>
               <a:ext uri="{FF2B5EF4-FFF2-40B4-BE49-F238E27FC236}">
-                <a16:creationId xmlns:a16="http://schemas.microsoft.com/office/drawing/2014/main" id="{9427A4A0-CE56-2F0F-CAD8-A97CAAA65243}"/>
+                <a16:creationId xmlns:a16="http://schemas.microsoft.com/office/drawing/2014/main" id="{D176948F-3294-17C1-9F25-5EDA57DA8A99}"/>
               </a:ext>
             </a:extLst>
           </p:cNvPr>
@@ -1691,7 +1691,7 @@
           <p:cNvPr id="3" name="テキスト プレースホルダー 2">
             <a:extLst>
               <a:ext uri="{FF2B5EF4-FFF2-40B4-BE49-F238E27FC236}">
-                <a16:creationId xmlns:a16="http://schemas.microsoft.com/office/drawing/2014/main" id="{E0B9548C-CE66-9ED1-66A3-D29A3E62EC36}"/>
+                <a16:creationId xmlns:a16="http://schemas.microsoft.com/office/drawing/2014/main" id="{86ABD5D9-A650-78D5-2BB8-5988DBEC0CDE}"/>
               </a:ext>
             </a:extLst>
           </p:cNvPr>
@@ -1762,7 +1762,7 @@
           <p:cNvPr id="4" name="コンテンツ プレースホルダー 3">
             <a:extLst>
               <a:ext uri="{FF2B5EF4-FFF2-40B4-BE49-F238E27FC236}">
-                <a16:creationId xmlns:a16="http://schemas.microsoft.com/office/drawing/2014/main" id="{13168036-C895-CB4B-E54B-99620859FC6C}"/>
+                <a16:creationId xmlns:a16="http://schemas.microsoft.com/office/drawing/2014/main" id="{97611D30-3A04-78F9-2156-5248396D4E5F}"/>
               </a:ext>
             </a:extLst>
           </p:cNvPr>
@@ -1856,7 +1856,7 @@
           <p:cNvPr id="5" name="テキスト プレースホルダー 4">
             <a:extLst>
               <a:ext uri="{FF2B5EF4-FFF2-40B4-BE49-F238E27FC236}">
-                <a16:creationId xmlns:a16="http://schemas.microsoft.com/office/drawing/2014/main" id="{5BB17D3E-C72C-2FBF-6A4D-18D7142E25D3}"/>
+                <a16:creationId xmlns:a16="http://schemas.microsoft.com/office/drawing/2014/main" id="{A2120E48-D5EA-E6F5-9241-511ABDC221F1}"/>
               </a:ext>
             </a:extLst>
           </p:cNvPr>
@@ -1927,7 +1927,7 @@
           <p:cNvPr id="6" name="コンテンツ プレースホルダー 5">
             <a:extLst>
               <a:ext uri="{FF2B5EF4-FFF2-40B4-BE49-F238E27FC236}">
-                <a16:creationId xmlns:a16="http://schemas.microsoft.com/office/drawing/2014/main" id="{39720DA3-9BC4-290E-7E97-9F1E657AE3BE}"/>
+                <a16:creationId xmlns:a16="http://schemas.microsoft.com/office/drawing/2014/main" id="{E7AA702F-D9AE-BAC4-B8C0-EBADA622DD08}"/>
               </a:ext>
             </a:extLst>
           </p:cNvPr>
@@ -2021,7 +2021,7 @@
           <p:cNvPr id="7" name="日付プレースホルダー 6">
             <a:extLst>
               <a:ext uri="{FF2B5EF4-FFF2-40B4-BE49-F238E27FC236}">
-                <a16:creationId xmlns:a16="http://schemas.microsoft.com/office/drawing/2014/main" id="{14D99EC7-8B7B-4255-2056-20E209AD8EDF}"/>
+                <a16:creationId xmlns:a16="http://schemas.microsoft.com/office/drawing/2014/main" id="{EDB3F828-5F9E-86A7-9B05-25A6733F8D76}"/>
               </a:ext>
             </a:extLst>
           </p:cNvPr>
@@ -2037,7 +2037,7 @@
           <a:bodyPr/>
           <a:lstStyle/>
           <a:p>
-            <a:fld id="{B6A0002B-A49C-46A7-A423-AE5335FBDEEF}" type="datetimeFigureOut">
+            <a:fld id="{F4A6FCA5-62B8-4C15-9D32-6B3F5DFC80E5}" type="datetimeFigureOut">
               <a:rPr kumimoji="1" lang="ja-JP" altLang="en-US" smtClean="0"/>
               <a:t>2026/7/30</a:t>
             </a:fld>
@@ -2050,7 +2050,7 @@
           <p:cNvPr id="8" name="フッター プレースホルダー 7">
             <a:extLst>
               <a:ext uri="{FF2B5EF4-FFF2-40B4-BE49-F238E27FC236}">
-                <a16:creationId xmlns:a16="http://schemas.microsoft.com/office/drawing/2014/main" id="{E5C76C14-934F-4C9C-B8F7-F82F4A86F8AC}"/>
+                <a16:creationId xmlns:a16="http://schemas.microsoft.com/office/drawing/2014/main" id="{0E79C2B5-07BA-AB62-515B-5DE3E3508034}"/>
               </a:ext>
             </a:extLst>
           </p:cNvPr>
@@ -2075,7 +2075,7 @@
           <p:cNvPr id="9" name="スライド番号プレースホルダー 8">
             <a:extLst>
               <a:ext uri="{FF2B5EF4-FFF2-40B4-BE49-F238E27FC236}">
-                <a16:creationId xmlns:a16="http://schemas.microsoft.com/office/drawing/2014/main" id="{F6FEFE28-72AF-3762-688F-B78A49B67563}"/>
+                <a16:creationId xmlns:a16="http://schemas.microsoft.com/office/drawing/2014/main" id="{4E6D63FE-DDA0-0E09-373F-84DBD164DE71}"/>
               </a:ext>
             </a:extLst>
           </p:cNvPr>
@@ -2091,7 +2091,7 @@
           <a:bodyPr/>
           <a:lstStyle/>
           <a:p>
-            <a:fld id="{15A37593-B8CC-4303-A635-0E45314FF835}" type="slidenum">
+            <a:fld id="{A096E928-4380-45D7-850F-B5D9F1E18264}" type="slidenum">
               <a:rPr kumimoji="1" lang="ja-JP" altLang="en-US" smtClean="0"/>
               <a:t>‹#›</a:t>
             </a:fld>
@@ -2102,7 +2102,7 @@
     </p:spTree>
     <p:extLst>
       <p:ext uri="{BB962C8B-B14F-4D97-AF65-F5344CB8AC3E}">
-        <p14:creationId xmlns:p14="http://schemas.microsoft.com/office/powerpoint/2010/main" val="3502868332"/>
+        <p14:creationId xmlns:p14="http://schemas.microsoft.com/office/powerpoint/2010/main" val="1684599642"/>
       </p:ext>
     </p:extLst>
   </p:cSld>
@@ -2134,7 +2134,7 @@
           <p:cNvPr id="2" name="タイトル 1">
             <a:extLst>
               <a:ext uri="{FF2B5EF4-FFF2-40B4-BE49-F238E27FC236}">
-                <a16:creationId xmlns:a16="http://schemas.microsoft.com/office/drawing/2014/main" id="{A3D48475-A387-B570-D76D-FD490A15C22D}"/>
+                <a16:creationId xmlns:a16="http://schemas.microsoft.com/office/drawing/2014/main" id="{A8C86808-EF0B-A7B1-315F-23A515ABD799}"/>
               </a:ext>
             </a:extLst>
           </p:cNvPr>
@@ -2162,7 +2162,7 @@
           <p:cNvPr id="3" name="日付プレースホルダー 2">
             <a:extLst>
               <a:ext uri="{FF2B5EF4-FFF2-40B4-BE49-F238E27FC236}">
-                <a16:creationId xmlns:a16="http://schemas.microsoft.com/office/drawing/2014/main" id="{71335667-4473-0D3F-C8B5-872322C728EA}"/>
+                <a16:creationId xmlns:a16="http://schemas.microsoft.com/office/drawing/2014/main" id="{82687BE4-D02D-E97F-0B7B-8E563AD37BC5}"/>
               </a:ext>
             </a:extLst>
           </p:cNvPr>
@@ -2178,7 +2178,7 @@
           <a:bodyPr/>
           <a:lstStyle/>
           <a:p>
-            <a:fld id="{B6A0002B-A49C-46A7-A423-AE5335FBDEEF}" type="datetimeFigureOut">
+            <a:fld id="{F4A6FCA5-62B8-4C15-9D32-6B3F5DFC80E5}" type="datetimeFigureOut">
               <a:rPr kumimoji="1" lang="ja-JP" altLang="en-US" smtClean="0"/>
               <a:t>2026/7/30</a:t>
             </a:fld>
@@ -2191,7 +2191,7 @@
           <p:cNvPr id="4" name="フッター プレースホルダー 3">
             <a:extLst>
               <a:ext uri="{FF2B5EF4-FFF2-40B4-BE49-F238E27FC236}">
-                <a16:creationId xmlns:a16="http://schemas.microsoft.com/office/drawing/2014/main" id="{94ADF4DD-A850-B6DF-A3E1-9062D40AB1D6}"/>
+                <a16:creationId xmlns:a16="http://schemas.microsoft.com/office/drawing/2014/main" id="{516A6BC7-1A57-4927-EC97-B5B4725720A7}"/>
               </a:ext>
             </a:extLst>
           </p:cNvPr>
@@ -2216,7 +2216,7 @@
           <p:cNvPr id="5" name="スライド番号プレースホルダー 4">
             <a:extLst>
               <a:ext uri="{FF2B5EF4-FFF2-40B4-BE49-F238E27FC236}">
-                <a16:creationId xmlns:a16="http://schemas.microsoft.com/office/drawing/2014/main" id="{45692314-AE6E-82F2-16C8-800C579C208E}"/>
+                <a16:creationId xmlns:a16="http://schemas.microsoft.com/office/drawing/2014/main" id="{62B739E7-0C4D-35E7-44A3-44BF29976FA0}"/>
               </a:ext>
             </a:extLst>
           </p:cNvPr>
@@ -2232,7 +2232,7 @@
           <a:bodyPr/>
           <a:lstStyle/>
           <a:p>
-            <a:fld id="{15A37593-B8CC-4303-A635-0E45314FF835}" type="slidenum">
+            <a:fld id="{A096E928-4380-45D7-850F-B5D9F1E18264}" type="slidenum">
               <a:rPr kumimoji="1" lang="ja-JP" altLang="en-US" smtClean="0"/>
               <a:t>‹#›</a:t>
             </a:fld>
@@ -2243,7 +2243,7 @@
     </p:spTree>
     <p:extLst>
       <p:ext uri="{BB962C8B-B14F-4D97-AF65-F5344CB8AC3E}">
-        <p14:creationId xmlns:p14="http://schemas.microsoft.com/office/powerpoint/2010/main" val="3473469592"/>
+        <p14:creationId xmlns:p14="http://schemas.microsoft.com/office/powerpoint/2010/main" val="2635087248"/>
       </p:ext>
     </p:extLst>
   </p:cSld>
@@ -2275,7 +2275,7 @@
           <p:cNvPr id="2" name="日付プレースホルダー 1">
             <a:extLst>
               <a:ext uri="{FF2B5EF4-FFF2-40B4-BE49-F238E27FC236}">
-                <a16:creationId xmlns:a16="http://schemas.microsoft.com/office/drawing/2014/main" id="{FED859B9-3E48-990C-6B0C-7CB7E2A0D1BE}"/>
+                <a16:creationId xmlns:a16="http://schemas.microsoft.com/office/drawing/2014/main" id="{12E9279A-1D64-B57F-79EB-3DE409DEF8A9}"/>
               </a:ext>
             </a:extLst>
           </p:cNvPr>
@@ -2291,7 +2291,7 @@
           <a:bodyPr/>
           <a:lstStyle/>
           <a:p>
-            <a:fld id="{B6A0002B-A49C-46A7-A423-AE5335FBDEEF}" type="datetimeFigureOut">
+            <a:fld id="{F4A6FCA5-62B8-4C15-9D32-6B3F5DFC80E5}" type="datetimeFigureOut">
               <a:rPr kumimoji="1" lang="ja-JP" altLang="en-US" smtClean="0"/>
               <a:t>2026/7/30</a:t>
             </a:fld>
@@ -2304,7 +2304,7 @@
           <p:cNvPr id="3" name="フッター プレースホルダー 2">
             <a:extLst>
               <a:ext uri="{FF2B5EF4-FFF2-40B4-BE49-F238E27FC236}">
-                <a16:creationId xmlns:a16="http://schemas.microsoft.com/office/drawing/2014/main" id="{AC719A08-7114-8CE8-D431-877E228EDE04}"/>
+                <a16:creationId xmlns:a16="http://schemas.microsoft.com/office/drawing/2014/main" id="{1F561D11-2530-562F-BAE2-15C422ECD8F2}"/>
               </a:ext>
             </a:extLst>
           </p:cNvPr>
@@ -2329,7 +2329,7 @@
           <p:cNvPr id="4" name="スライド番号プレースホルダー 3">
             <a:extLst>
               <a:ext uri="{FF2B5EF4-FFF2-40B4-BE49-F238E27FC236}">
-                <a16:creationId xmlns:a16="http://schemas.microsoft.com/office/drawing/2014/main" id="{D7A153C9-A873-1334-E1D3-E1D64C362A51}"/>
+                <a16:creationId xmlns:a16="http://schemas.microsoft.com/office/drawing/2014/main" id="{88A6A739-C3ED-F219-C9CF-33A1E3FCBAAF}"/>
               </a:ext>
             </a:extLst>
           </p:cNvPr>
@@ -2345,7 +2345,7 @@
           <a:bodyPr/>
           <a:lstStyle/>
           <a:p>
-            <a:fld id="{15A37593-B8CC-4303-A635-0E45314FF835}" type="slidenum">
+            <a:fld id="{A096E928-4380-45D7-850F-B5D9F1E18264}" type="slidenum">
               <a:rPr kumimoji="1" lang="ja-JP" altLang="en-US" smtClean="0"/>
               <a:t>‹#›</a:t>
             </a:fld>
@@ -2356,7 +2356,7 @@
     </p:spTree>
     <p:extLst>
       <p:ext uri="{BB962C8B-B14F-4D97-AF65-F5344CB8AC3E}">
-        <p14:creationId xmlns:p14="http://schemas.microsoft.com/office/powerpoint/2010/main" val="2510833084"/>
+        <p14:creationId xmlns:p14="http://schemas.microsoft.com/office/powerpoint/2010/main" val="2068870090"/>
       </p:ext>
     </p:extLst>
   </p:cSld>
@@ -2388,7 +2388,7 @@
           <p:cNvPr id="2" name="タイトル 1">
             <a:extLst>
               <a:ext uri="{FF2B5EF4-FFF2-40B4-BE49-F238E27FC236}">
-                <a16:creationId xmlns:a16="http://schemas.microsoft.com/office/drawing/2014/main" id="{28F4D5BE-88A6-97CE-B6AE-E80837CA7BB7}"/>
+                <a16:creationId xmlns:a16="http://schemas.microsoft.com/office/drawing/2014/main" id="{97FC8661-B8D5-8759-EA6E-0D6E82D0DA0B}"/>
               </a:ext>
             </a:extLst>
           </p:cNvPr>
@@ -2425,7 +2425,7 @@
           <p:cNvPr id="3" name="コンテンツ プレースホルダー 2">
             <a:extLst>
               <a:ext uri="{FF2B5EF4-FFF2-40B4-BE49-F238E27FC236}">
-                <a16:creationId xmlns:a16="http://schemas.microsoft.com/office/drawing/2014/main" id="{3D73AFC0-B0E7-4AD9-AD2F-718E974D154F}"/>
+                <a16:creationId xmlns:a16="http://schemas.microsoft.com/office/drawing/2014/main" id="{3DDD8E64-01E0-C69C-C298-81AF5CB01963}"/>
               </a:ext>
             </a:extLst>
           </p:cNvPr>
@@ -2547,7 +2547,7 @@
           <p:cNvPr id="4" name="テキスト プレースホルダー 3">
             <a:extLst>
               <a:ext uri="{FF2B5EF4-FFF2-40B4-BE49-F238E27FC236}">
-                <a16:creationId xmlns:a16="http://schemas.microsoft.com/office/drawing/2014/main" id="{BD64E243-04A1-19DB-76D9-4DF9C44608B3}"/>
+                <a16:creationId xmlns:a16="http://schemas.microsoft.com/office/drawing/2014/main" id="{071D9EA0-08B9-2765-77FA-B023D7F15758}"/>
               </a:ext>
             </a:extLst>
           </p:cNvPr>
@@ -2618,7 +2618,7 @@
           <p:cNvPr id="5" name="日付プレースホルダー 4">
             <a:extLst>
               <a:ext uri="{FF2B5EF4-FFF2-40B4-BE49-F238E27FC236}">
-                <a16:creationId xmlns:a16="http://schemas.microsoft.com/office/drawing/2014/main" id="{27D25ABF-EC4A-9497-062D-6C2D927B295A}"/>
+                <a16:creationId xmlns:a16="http://schemas.microsoft.com/office/drawing/2014/main" id="{7E4C8A83-5956-BF68-F3B6-3A2044C0360B}"/>
               </a:ext>
             </a:extLst>
           </p:cNvPr>
@@ -2634,7 +2634,7 @@
           <a:bodyPr/>
           <a:lstStyle/>
           <a:p>
-            <a:fld id="{B6A0002B-A49C-46A7-A423-AE5335FBDEEF}" type="datetimeFigureOut">
+            <a:fld id="{F4A6FCA5-62B8-4C15-9D32-6B3F5DFC80E5}" type="datetimeFigureOut">
               <a:rPr kumimoji="1" lang="ja-JP" altLang="en-US" smtClean="0"/>
               <a:t>2026/7/30</a:t>
             </a:fld>
@@ -2647,7 +2647,7 @@
           <p:cNvPr id="6" name="フッター プレースホルダー 5">
             <a:extLst>
               <a:ext uri="{FF2B5EF4-FFF2-40B4-BE49-F238E27FC236}">
-                <a16:creationId xmlns:a16="http://schemas.microsoft.com/office/drawing/2014/main" id="{1AD46789-CF06-AE24-3CC5-B3585A1BF0BF}"/>
+                <a16:creationId xmlns:a16="http://schemas.microsoft.com/office/drawing/2014/main" id="{5DE6BD21-34FC-51BF-6BD6-F21276F326C3}"/>
               </a:ext>
             </a:extLst>
           </p:cNvPr>
@@ -2672,7 +2672,7 @@
           <p:cNvPr id="7" name="スライド番号プレースホルダー 6">
             <a:extLst>
               <a:ext uri="{FF2B5EF4-FFF2-40B4-BE49-F238E27FC236}">
-                <a16:creationId xmlns:a16="http://schemas.microsoft.com/office/drawing/2014/main" id="{DF9BE2D2-4E69-7285-F46D-9BCC13956E0B}"/>
+                <a16:creationId xmlns:a16="http://schemas.microsoft.com/office/drawing/2014/main" id="{D9A1AD90-8DCE-2D65-7E56-C93721FA4AD8}"/>
               </a:ext>
             </a:extLst>
           </p:cNvPr>
@@ -2688,7 +2688,7 @@
           <a:bodyPr/>
           <a:lstStyle/>
           <a:p>
-            <a:fld id="{15A37593-B8CC-4303-A635-0E45314FF835}" type="slidenum">
+            <a:fld id="{A096E928-4380-45D7-850F-B5D9F1E18264}" type="slidenum">
               <a:rPr kumimoji="1" lang="ja-JP" altLang="en-US" smtClean="0"/>
               <a:t>‹#›</a:t>
             </a:fld>
@@ -2699,7 +2699,7 @@
     </p:spTree>
     <p:extLst>
       <p:ext uri="{BB962C8B-B14F-4D97-AF65-F5344CB8AC3E}">
-        <p14:creationId xmlns:p14="http://schemas.microsoft.com/office/powerpoint/2010/main" val="2890820344"/>
+        <p14:creationId xmlns:p14="http://schemas.microsoft.com/office/powerpoint/2010/main" val="4243687742"/>
       </p:ext>
     </p:extLst>
   </p:cSld>
@@ -2731,7 +2731,7 @@
           <p:cNvPr id="2" name="タイトル 1">
             <a:extLst>
               <a:ext uri="{FF2B5EF4-FFF2-40B4-BE49-F238E27FC236}">
-                <a16:creationId xmlns:a16="http://schemas.microsoft.com/office/drawing/2014/main" id="{75AD108B-AAFA-2AA5-D74B-C7CFCE76D790}"/>
+                <a16:creationId xmlns:a16="http://schemas.microsoft.com/office/drawing/2014/main" id="{6CF4064E-7DC5-3DB6-81B0-CF07A2C05963}"/>
               </a:ext>
             </a:extLst>
           </p:cNvPr>
@@ -2768,7 +2768,7 @@
           <p:cNvPr id="3" name="図プレースホルダー 2">
             <a:extLst>
               <a:ext uri="{FF2B5EF4-FFF2-40B4-BE49-F238E27FC236}">
-                <a16:creationId xmlns:a16="http://schemas.microsoft.com/office/drawing/2014/main" id="{5939C35B-5124-E9C9-527A-E60E05B844FA}"/>
+                <a16:creationId xmlns:a16="http://schemas.microsoft.com/office/drawing/2014/main" id="{CB603894-08A4-BDC9-770F-D877752D6329}"/>
               </a:ext>
             </a:extLst>
           </p:cNvPr>
@@ -2835,7 +2835,7 @@
           <p:cNvPr id="4" name="テキスト プレースホルダー 3">
             <a:extLst>
               <a:ext uri="{FF2B5EF4-FFF2-40B4-BE49-F238E27FC236}">
-                <a16:creationId xmlns:a16="http://schemas.microsoft.com/office/drawing/2014/main" id="{4568994E-C64E-1849-B4B2-81BFBC140711}"/>
+                <a16:creationId xmlns:a16="http://schemas.microsoft.com/office/drawing/2014/main" id="{8F15C764-0C36-1661-906F-0F7C34400437}"/>
               </a:ext>
             </a:extLst>
           </p:cNvPr>
@@ -2906,7 +2906,7 @@
           <p:cNvPr id="5" name="日付プレースホルダー 4">
             <a:extLst>
               <a:ext uri="{FF2B5EF4-FFF2-40B4-BE49-F238E27FC236}">
-                <a16:creationId xmlns:a16="http://schemas.microsoft.com/office/drawing/2014/main" id="{3903E437-C885-96F0-FBCE-766BB6FB2B85}"/>
+                <a16:creationId xmlns:a16="http://schemas.microsoft.com/office/drawing/2014/main" id="{CC75E92A-5A76-8C82-5AC9-59793E13E13E}"/>
               </a:ext>
             </a:extLst>
           </p:cNvPr>
@@ -2922,7 +2922,7 @@
           <a:bodyPr/>
           <a:lstStyle/>
           <a:p>
-            <a:fld id="{B6A0002B-A49C-46A7-A423-AE5335FBDEEF}" type="datetimeFigureOut">
+            <a:fld id="{F4A6FCA5-62B8-4C15-9D32-6B3F5DFC80E5}" type="datetimeFigureOut">
               <a:rPr kumimoji="1" lang="ja-JP" altLang="en-US" smtClean="0"/>
               <a:t>2026/7/30</a:t>
             </a:fld>
@@ -2935,7 +2935,7 @@
           <p:cNvPr id="6" name="フッター プレースホルダー 5">
             <a:extLst>
               <a:ext uri="{FF2B5EF4-FFF2-40B4-BE49-F238E27FC236}">
-                <a16:creationId xmlns:a16="http://schemas.microsoft.com/office/drawing/2014/main" id="{32823BBC-4B07-3BC7-CE53-99AFB0101628}"/>
+                <a16:creationId xmlns:a16="http://schemas.microsoft.com/office/drawing/2014/main" id="{EEBD9A15-D1F8-C902-C101-F79A031715A9}"/>
               </a:ext>
             </a:extLst>
           </p:cNvPr>
@@ -2960,7 +2960,7 @@
           <p:cNvPr id="7" name="スライド番号プレースホルダー 6">
             <a:extLst>
               <a:ext uri="{FF2B5EF4-FFF2-40B4-BE49-F238E27FC236}">
-                <a16:creationId xmlns:a16="http://schemas.microsoft.com/office/drawing/2014/main" id="{5FFEC132-D7CC-21B4-4B8C-B3371D467D5A}"/>
+                <a16:creationId xmlns:a16="http://schemas.microsoft.com/office/drawing/2014/main" id="{C0D44BCF-BC27-3F29-0A35-B392EFE97B35}"/>
               </a:ext>
             </a:extLst>
           </p:cNvPr>
@@ -2976,7 +2976,7 @@
           <a:bodyPr/>
           <a:lstStyle/>
           <a:p>
-            <a:fld id="{15A37593-B8CC-4303-A635-0E45314FF835}" type="slidenum">
+            <a:fld id="{A096E928-4380-45D7-850F-B5D9F1E18264}" type="slidenum">
               <a:rPr kumimoji="1" lang="ja-JP" altLang="en-US" smtClean="0"/>
               <a:t>‹#›</a:t>
             </a:fld>
@@ -2987,7 +2987,7 @@
     </p:spTree>
     <p:extLst>
       <p:ext uri="{BB962C8B-B14F-4D97-AF65-F5344CB8AC3E}">
-        <p14:creationId xmlns:p14="http://schemas.microsoft.com/office/powerpoint/2010/main" val="2914738286"/>
+        <p14:creationId xmlns:p14="http://schemas.microsoft.com/office/powerpoint/2010/main" val="372128959"/>
       </p:ext>
     </p:extLst>
   </p:cSld>
@@ -3024,7 +3024,7 @@
           <p:cNvPr id="2" name="タイトル プレースホルダー 1">
             <a:extLst>
               <a:ext uri="{FF2B5EF4-FFF2-40B4-BE49-F238E27FC236}">
-                <a16:creationId xmlns:a16="http://schemas.microsoft.com/office/drawing/2014/main" id="{EEB673BC-E6D6-0AA0-A92C-EED6CA67E448}"/>
+                <a16:creationId xmlns:a16="http://schemas.microsoft.com/office/drawing/2014/main" id="{EB0F2DD7-FE44-BBF2-7A37-C008B5E24AE2}"/>
               </a:ext>
             </a:extLst>
           </p:cNvPr>
@@ -3062,7 +3062,7 @@
           <p:cNvPr id="3" name="テキスト プレースホルダー 2">
             <a:extLst>
               <a:ext uri="{FF2B5EF4-FFF2-40B4-BE49-F238E27FC236}">
-                <a16:creationId xmlns:a16="http://schemas.microsoft.com/office/drawing/2014/main" id="{4286BF2E-D8EF-D319-ACC2-983B03A55A76}"/>
+                <a16:creationId xmlns:a16="http://schemas.microsoft.com/office/drawing/2014/main" id="{3B9E6C77-36B8-0F9B-4F25-3F333548E6E3}"/>
               </a:ext>
             </a:extLst>
           </p:cNvPr>
@@ -3161,7 +3161,7 @@
           <p:cNvPr id="4" name="日付プレースホルダー 3">
             <a:extLst>
               <a:ext uri="{FF2B5EF4-FFF2-40B4-BE49-F238E27FC236}">
-                <a16:creationId xmlns:a16="http://schemas.microsoft.com/office/drawing/2014/main" id="{AD34A423-FA3C-0276-A8CF-5A72F037B3D6}"/>
+                <a16:creationId xmlns:a16="http://schemas.microsoft.com/office/drawing/2014/main" id="{921CD8F6-966B-BF86-529C-472A2FD040E6}"/>
               </a:ext>
             </a:extLst>
           </p:cNvPr>
@@ -3195,7 +3195,7 @@
             </a:lvl1pPr>
           </a:lstStyle>
           <a:p>
-            <a:fld id="{B6A0002B-A49C-46A7-A423-AE5335FBDEEF}" type="datetimeFigureOut">
+            <a:fld id="{F4A6FCA5-62B8-4C15-9D32-6B3F5DFC80E5}" type="datetimeFigureOut">
               <a:rPr kumimoji="1" lang="ja-JP" altLang="en-US" smtClean="0"/>
               <a:t>2026/7/30</a:t>
             </a:fld>
@@ -3208,7 +3208,7 @@
           <p:cNvPr id="5" name="フッター プレースホルダー 4">
             <a:extLst>
               <a:ext uri="{FF2B5EF4-FFF2-40B4-BE49-F238E27FC236}">
-                <a16:creationId xmlns:a16="http://schemas.microsoft.com/office/drawing/2014/main" id="{9DE6DC3B-9BC2-B3A6-5075-E7DB23F7DB61}"/>
+                <a16:creationId xmlns:a16="http://schemas.microsoft.com/office/drawing/2014/main" id="{BB108AED-4D2D-8DDD-49E3-878EF8BBA6A5}"/>
               </a:ext>
             </a:extLst>
           </p:cNvPr>
@@ -3251,7 +3251,7 @@
           <p:cNvPr id="6" name="スライド番号プレースホルダー 5">
             <a:extLst>
               <a:ext uri="{FF2B5EF4-FFF2-40B4-BE49-F238E27FC236}">
-                <a16:creationId xmlns:a16="http://schemas.microsoft.com/office/drawing/2014/main" id="{76EC6B4F-9D2F-6A00-CA15-FCBDF2732386}"/>
+                <a16:creationId xmlns:a16="http://schemas.microsoft.com/office/drawing/2014/main" id="{4A231448-84F3-5A62-77A4-21BAFDD02AC7}"/>
               </a:ext>
             </a:extLst>
           </p:cNvPr>
@@ -3285,7 +3285,7 @@
             </a:lvl1pPr>
           </a:lstStyle>
           <a:p>
-            <a:fld id="{15A37593-B8CC-4303-A635-0E45314FF835}" type="slidenum">
+            <a:fld id="{A096E928-4380-45D7-850F-B5D9F1E18264}" type="slidenum">
               <a:rPr kumimoji="1" lang="ja-JP" altLang="en-US" smtClean="0"/>
               <a:t>‹#›</a:t>
             </a:fld>
@@ -3296,7 +3296,7 @@
     </p:spTree>
     <p:extLst>
       <p:ext uri="{BB962C8B-B14F-4D97-AF65-F5344CB8AC3E}">
-        <p14:creationId xmlns:p14="http://schemas.microsoft.com/office/powerpoint/2010/main" val="3083758638"/>
+        <p14:creationId xmlns:p14="http://schemas.microsoft.com/office/powerpoint/2010/main" val="814113451"/>
       </p:ext>
     </p:extLst>
   </p:cSld>
@@ -3619,7 +3619,7 @@
           <p:cNvPr id="2" name="テキスト ボックス 1">
             <a:extLst>
               <a:ext uri="{FF2B5EF4-FFF2-40B4-BE49-F238E27FC236}">
-                <a16:creationId xmlns:a16="http://schemas.microsoft.com/office/drawing/2014/main" id="{05FDD702-789E-540C-D683-ADFFCB58610E}"/>
+                <a16:creationId xmlns:a16="http://schemas.microsoft.com/office/drawing/2014/main" id="{F02E505B-B105-6214-F288-2B2352AEFCE2}"/>
               </a:ext>
             </a:extLst>
           </p:cNvPr>
@@ -3665,7 +3665,7 @@
           <p:cNvPr id="3" name="テキスト ボックス 2">
             <a:extLst>
               <a:ext uri="{FF2B5EF4-FFF2-40B4-BE49-F238E27FC236}">
-                <a16:creationId xmlns:a16="http://schemas.microsoft.com/office/drawing/2014/main" id="{B9A108B2-AFF5-CD4B-DB79-BEE410D30B4B}"/>
+                <a16:creationId xmlns:a16="http://schemas.microsoft.com/office/drawing/2014/main" id="{9E0D9BEA-B632-3201-3EC7-07DA0F252487}"/>
               </a:ext>
             </a:extLst>
           </p:cNvPr>
@@ -3695,14 +3695,17 @@
                 </a:solidFill>
                 <a:latin typeface="Arial" panose="020B0604020202020204" pitchFamily="34" charset="0"/>
               </a:rPr>
-              <a:t>retro-new-games TECH EXPLANATION</a:t>
-            </a:r>
-            <a:endParaRPr kumimoji="1" lang="ja-JP" altLang="en-US" sz="3400" b="1">
-              <a:solidFill>
-                <a:srgbClr val="111111"/>
-              </a:solidFill>
-              <a:latin typeface="Arial" panose="020B0604020202020204" pitchFamily="34" charset="0"/>
-            </a:endParaRPr>
+              <a:t>Retro New Games</a:t>
+            </a:r>
+            <a:r>
+              <a:rPr kumimoji="1" lang="ja-JP" altLang="en-US" sz="3400" b="1">
+                <a:solidFill>
+                  <a:srgbClr val="111111"/>
+                </a:solidFill>
+                <a:latin typeface="Arial" panose="020B0604020202020204" pitchFamily="34" charset="0"/>
+              </a:rPr>
+              <a:t>の技術解説</a:t>
+            </a:r>
           </a:p>
         </p:txBody>
       </p:sp>
@@ -3711,7 +3714,7 @@
           <p:cNvPr id="4" name="テキスト ボックス 3">
             <a:extLst>
               <a:ext uri="{FF2B5EF4-FFF2-40B4-BE49-F238E27FC236}">
-                <a16:creationId xmlns:a16="http://schemas.microsoft.com/office/drawing/2014/main" id="{2D741B94-F23C-43D4-6E1E-C17048E5532B}"/>
+                <a16:creationId xmlns:a16="http://schemas.microsoft.com/office/drawing/2014/main" id="{A7F0C822-D116-26D0-C04B-FEB95F2B27AF}"/>
               </a:ext>
             </a:extLst>
           </p:cNvPr>
@@ -3735,20 +3738,14 @@
           <a:lstStyle/>
           <a:p>
             <a:r>
-              <a:rPr kumimoji="1" lang="en-US" altLang="ja-JP" sz="2000">
+              <a:rPr kumimoji="1" lang="ja-JP" altLang="en-US" sz="2000">
                 <a:solidFill>
                   <a:srgbClr val="333333"/>
                 </a:solidFill>
                 <a:latin typeface="Arial" panose="020B0604020202020204" pitchFamily="34" charset="0"/>
               </a:rPr>
-              <a:t>Architecture, implementation and commit history in 75 seconds</a:t>
-            </a:r>
-            <a:endParaRPr kumimoji="1" lang="ja-JP" altLang="en-US" sz="2000">
-              <a:solidFill>
-                <a:srgbClr val="333333"/>
-              </a:solidFill>
-              <a:latin typeface="Arial" panose="020B0604020202020204" pitchFamily="34" charset="0"/>
-            </a:endParaRPr>
+              <a:t>設計・実装・コミットから学ぶ短時間プレビュー</a:t>
+            </a:r>
           </a:p>
         </p:txBody>
       </p:sp>
@@ -3757,7 +3754,7 @@
           <p:cNvPr id="5" name="テキスト ボックス 4">
             <a:extLst>
               <a:ext uri="{FF2B5EF4-FFF2-40B4-BE49-F238E27FC236}">
-                <a16:creationId xmlns:a16="http://schemas.microsoft.com/office/drawing/2014/main" id="{F38A2E30-FDB3-D72E-9653-9A17EF965F40}"/>
+                <a16:creationId xmlns:a16="http://schemas.microsoft.com/office/drawing/2014/main" id="{86862EBC-F99A-DEEE-3CD7-FA796339FBB7}"/>
               </a:ext>
             </a:extLst>
           </p:cNvPr>
@@ -3804,7 +3801,7 @@
             <a:hlinkClick r:id="" action="ppaction://media"/>
             <a:extLst>
               <a:ext uri="{FF2B5EF4-FFF2-40B4-BE49-F238E27FC236}">
-                <a16:creationId xmlns:a16="http://schemas.microsoft.com/office/drawing/2014/main" id="{74A2732C-76C9-2DAA-4FB1-5566540EADB4}"/>
+                <a16:creationId xmlns:a16="http://schemas.microsoft.com/office/drawing/2014/main" id="{A6FA5CAE-8B0D-3B1A-F2F5-7758E23E2560}"/>
               </a:ext>
             </a:extLst>
           </p:cNvPr>
@@ -3839,7 +3836,7 @@
     </p:spTree>
     <p:extLst>
       <p:ext uri="{BB962C8B-B14F-4D97-AF65-F5344CB8AC3E}">
-        <p14:creationId xmlns:p14="http://schemas.microsoft.com/office/powerpoint/2010/main" val="2165126256"/>
+        <p14:creationId xmlns:p14="http://schemas.microsoft.com/office/powerpoint/2010/main" val="2890635637"/>
       </p:ext>
     </p:extLst>
   </p:cSld>
@@ -3963,7 +3960,7 @@
           <p:cNvPr id="2" name="テキスト ボックス 1">
             <a:extLst>
               <a:ext uri="{FF2B5EF4-FFF2-40B4-BE49-F238E27FC236}">
-                <a16:creationId xmlns:a16="http://schemas.microsoft.com/office/drawing/2014/main" id="{F839F840-6F2F-10F1-511F-E380DA8D73A0}"/>
+                <a16:creationId xmlns:a16="http://schemas.microsoft.com/office/drawing/2014/main" id="{AF962B31-C32F-2BE6-CF29-409C7C7BC8FB}"/>
               </a:ext>
             </a:extLst>
           </p:cNvPr>
@@ -4009,7 +4006,7 @@
           <p:cNvPr id="3" name="テキスト ボックス 2">
             <a:extLst>
               <a:ext uri="{FF2B5EF4-FFF2-40B4-BE49-F238E27FC236}">
-                <a16:creationId xmlns:a16="http://schemas.microsoft.com/office/drawing/2014/main" id="{66829D95-2D4B-ABEC-7C52-5055636D37A4}"/>
+                <a16:creationId xmlns:a16="http://schemas.microsoft.com/office/drawing/2014/main" id="{8718DEF9-E310-E52A-2544-73D770B5AB08}"/>
               </a:ext>
             </a:extLst>
           </p:cNvPr>
@@ -4033,20 +4030,14 @@
           <a:lstStyle/>
           <a:p>
             <a:r>
-              <a:rPr kumimoji="1" lang="en-US" altLang="ja-JP" sz="3400" b="1">
+              <a:rPr kumimoji="1" lang="ja-JP" altLang="en-US" sz="3400" b="1">
                 <a:solidFill>
                   <a:srgbClr val="111111"/>
                 </a:solidFill>
                 <a:latin typeface="Arial" panose="020B0604020202020204" pitchFamily="34" charset="0"/>
               </a:rPr>
-              <a:t>WHAT DOES IT SOLVE?</a:t>
-            </a:r>
-            <a:endParaRPr kumimoji="1" lang="ja-JP" altLang="en-US" sz="3400" b="1">
-              <a:solidFill>
-                <a:srgbClr val="111111"/>
-              </a:solidFill>
-              <a:latin typeface="Arial" panose="020B0604020202020204" pitchFamily="34" charset="0"/>
-            </a:endParaRPr>
+              <a:t>このプロジェクトは何を解決する？</a:t>
+            </a:r>
           </a:p>
         </p:txBody>
       </p:sp>
@@ -4055,7 +4046,7 @@
           <p:cNvPr id="4" name="テキスト ボックス 3">
             <a:extLst>
               <a:ext uri="{FF2B5EF4-FFF2-40B4-BE49-F238E27FC236}">
-                <a16:creationId xmlns:a16="http://schemas.microsoft.com/office/drawing/2014/main" id="{A638ED64-9312-FE65-087E-4D4E33BBFFA2}"/>
+                <a16:creationId xmlns:a16="http://schemas.microsoft.com/office/drawing/2014/main" id="{CBD26CF5-0C73-9745-2A40-A9ECBE3B7225}"/>
               </a:ext>
             </a:extLst>
           </p:cNvPr>
@@ -4104,7 +4095,7 @@
           <p:cNvPr id="5" name="テキスト ボックス 4">
             <a:extLst>
               <a:ext uri="{FF2B5EF4-FFF2-40B4-BE49-F238E27FC236}">
-                <a16:creationId xmlns:a16="http://schemas.microsoft.com/office/drawing/2014/main" id="{933599FC-A710-9632-930A-088144A4264B}"/>
+                <a16:creationId xmlns:a16="http://schemas.microsoft.com/office/drawing/2014/main" id="{8A24C759-16E5-CD36-7C93-CF6F8424BF27}"/>
               </a:ext>
             </a:extLst>
           </p:cNvPr>
@@ -4151,7 +4142,7 @@
             <a:hlinkClick r:id="" action="ppaction://media"/>
             <a:extLst>
               <a:ext uri="{FF2B5EF4-FFF2-40B4-BE49-F238E27FC236}">
-                <a16:creationId xmlns:a16="http://schemas.microsoft.com/office/drawing/2014/main" id="{35BE2A59-E63F-2E85-20D0-C8F150AFFD57}"/>
+                <a16:creationId xmlns:a16="http://schemas.microsoft.com/office/drawing/2014/main" id="{8E139A78-5337-220C-42E8-D242FB8141CA}"/>
               </a:ext>
             </a:extLst>
           </p:cNvPr>
@@ -4186,7 +4177,7 @@
     </p:spTree>
     <p:extLst>
       <p:ext uri="{BB962C8B-B14F-4D97-AF65-F5344CB8AC3E}">
-        <p14:creationId xmlns:p14="http://schemas.microsoft.com/office/powerpoint/2010/main" val="252597762"/>
+        <p14:creationId xmlns:p14="http://schemas.microsoft.com/office/powerpoint/2010/main" val="3927374599"/>
       </p:ext>
     </p:extLst>
   </p:cSld>
@@ -4310,7 +4301,7 @@
           <p:cNvPr id="2" name="テキスト ボックス 1">
             <a:extLst>
               <a:ext uri="{FF2B5EF4-FFF2-40B4-BE49-F238E27FC236}">
-                <a16:creationId xmlns:a16="http://schemas.microsoft.com/office/drawing/2014/main" id="{C355C8BD-29C5-A0C1-A50D-FE15752FF9A6}"/>
+                <a16:creationId xmlns:a16="http://schemas.microsoft.com/office/drawing/2014/main" id="{896D06AA-E9C1-A59C-A7AD-C4736DB7A103}"/>
               </a:ext>
             </a:extLst>
           </p:cNvPr>
@@ -4356,7 +4347,7 @@
           <p:cNvPr id="3" name="テキスト ボックス 2">
             <a:extLst>
               <a:ext uri="{FF2B5EF4-FFF2-40B4-BE49-F238E27FC236}">
-                <a16:creationId xmlns:a16="http://schemas.microsoft.com/office/drawing/2014/main" id="{CF07A652-0365-EFDE-E440-F9871163E612}"/>
+                <a16:creationId xmlns:a16="http://schemas.microsoft.com/office/drawing/2014/main" id="{E5CBC499-B75C-4493-6849-508315FF4407}"/>
               </a:ext>
             </a:extLst>
           </p:cNvPr>
@@ -4380,20 +4371,14 @@
           <a:lstStyle/>
           <a:p>
             <a:r>
-              <a:rPr kumimoji="1" lang="en-US" altLang="ja-JP" sz="3400" b="1">
+              <a:rPr kumimoji="1" lang="ja-JP" altLang="en-US" sz="3400" b="1">
                 <a:solidFill>
                   <a:srgbClr val="111111"/>
                 </a:solidFill>
                 <a:latin typeface="Arial" panose="020B0604020202020204" pitchFamily="34" charset="0"/>
               </a:rPr>
-              <a:t>TECH STACK</a:t>
-            </a:r>
-            <a:endParaRPr kumimoji="1" lang="ja-JP" altLang="en-US" sz="3400" b="1">
-              <a:solidFill>
-                <a:srgbClr val="111111"/>
-              </a:solidFill>
-              <a:latin typeface="Arial" panose="020B0604020202020204" pitchFamily="34" charset="0"/>
-            </a:endParaRPr>
+              <a:t>技術スタック</a:t>
+            </a:r>
           </a:p>
         </p:txBody>
       </p:sp>
@@ -4402,7 +4387,7 @@
           <p:cNvPr id="4" name="テキスト ボックス 3">
             <a:extLst>
               <a:ext uri="{FF2B5EF4-FFF2-40B4-BE49-F238E27FC236}">
-                <a16:creationId xmlns:a16="http://schemas.microsoft.com/office/drawing/2014/main" id="{D764739E-F310-6399-FACD-EF8A7E840D93}"/>
+                <a16:creationId xmlns:a16="http://schemas.microsoft.com/office/drawing/2014/main" id="{2D54F264-F94A-CB30-81BE-02634958B1F0}"/>
               </a:ext>
             </a:extLst>
           </p:cNvPr>
@@ -4412,7 +4397,7 @@
         <p:spPr>
           <a:xfrm>
             <a:off x="533400" y="3429000"/>
-            <a:ext cx="10795000" cy="400110"/>
+            <a:ext cx="10795000" cy="707886"/>
           </a:xfrm>
           <a:prstGeom prst="rect">
             <a:avLst/>
@@ -4426,13 +4411,22 @@
           <a:lstStyle/>
           <a:p>
             <a:r>
+              <a:rPr kumimoji="1" lang="ja-JP" altLang="en-US" sz="2000">
+                <a:solidFill>
+                  <a:srgbClr val="333333"/>
+                </a:solidFill>
+                <a:latin typeface="Arial" panose="020B0604020202020204" pitchFamily="34" charset="0"/>
+              </a:rPr>
+              <a:t>主要技術：</a:t>
+            </a:r>
+            <a:r>
               <a:rPr kumimoji="1" lang="en-US" altLang="ja-JP" sz="2000">
                 <a:solidFill>
                   <a:srgbClr val="333333"/>
                 </a:solidFill>
                 <a:latin typeface="Arial" panose="020B0604020202020204" pitchFamily="34" charset="0"/>
               </a:rPr>
-              <a:t>Primary technologies: TypeScript</a:t>
+              <a:t>TypeScript</a:t>
             </a:r>
             <a:r>
               <a:rPr kumimoji="1" lang="ja-JP" altLang="en-US" sz="2000">
@@ -4450,14 +4444,18 @@
                 </a:solidFill>
                 <a:latin typeface="Arial" panose="020B0604020202020204" pitchFamily="34" charset="0"/>
               </a:rPr>
-              <a:t>JavaScript</a:t>
-            </a:r>
-            <a:endParaRPr kumimoji="1" lang="ja-JP" altLang="en-US" sz="2000">
-              <a:solidFill>
-                <a:srgbClr val="333333"/>
-              </a:solidFill>
-              <a:latin typeface="Arial" panose="020B0604020202020204" pitchFamily="34" charset="0"/>
-            </a:endParaRPr>
+              <a:t>JavaScript
+</a:t>
+            </a:r>
+            <a:r>
+              <a:rPr kumimoji="1" lang="ja-JP" altLang="en-US" sz="2000">
+                <a:solidFill>
+                  <a:srgbClr val="333333"/>
+                </a:solidFill>
+                <a:latin typeface="Arial" panose="020B0604020202020204" pitchFamily="34" charset="0"/>
+              </a:rPr>
+              <a:t>役割を分け、保守しやすい構成を目指しています。</a:t>
+            </a:r>
           </a:p>
         </p:txBody>
       </p:sp>
@@ -4466,7 +4464,7 @@
           <p:cNvPr id="5" name="テキスト ボックス 4">
             <a:extLst>
               <a:ext uri="{FF2B5EF4-FFF2-40B4-BE49-F238E27FC236}">
-                <a16:creationId xmlns:a16="http://schemas.microsoft.com/office/drawing/2014/main" id="{99A0E214-1DD0-B3C2-F0A6-D728E9D4AE69}"/>
+                <a16:creationId xmlns:a16="http://schemas.microsoft.com/office/drawing/2014/main" id="{CFAC9664-78D4-F034-344A-ED71707E91C7}"/>
               </a:ext>
             </a:extLst>
           </p:cNvPr>
@@ -4513,7 +4511,7 @@
             <a:hlinkClick r:id="" action="ppaction://media"/>
             <a:extLst>
               <a:ext uri="{FF2B5EF4-FFF2-40B4-BE49-F238E27FC236}">
-                <a16:creationId xmlns:a16="http://schemas.microsoft.com/office/drawing/2014/main" id="{D047C91B-8DAF-C3FD-B237-82A1C7C2D37D}"/>
+                <a16:creationId xmlns:a16="http://schemas.microsoft.com/office/drawing/2014/main" id="{BD2D851C-5F75-2DA1-8542-6EB3646D4686}"/>
               </a:ext>
             </a:extLst>
           </p:cNvPr>
@@ -4548,7 +4546,7 @@
     </p:spTree>
     <p:extLst>
       <p:ext uri="{BB962C8B-B14F-4D97-AF65-F5344CB8AC3E}">
-        <p14:creationId xmlns:p14="http://schemas.microsoft.com/office/powerpoint/2010/main" val="3897418770"/>
+        <p14:creationId xmlns:p14="http://schemas.microsoft.com/office/powerpoint/2010/main" val="325268847"/>
       </p:ext>
     </p:extLst>
   </p:cSld>
@@ -4672,7 +4670,7 @@
           <p:cNvPr id="2" name="テキスト ボックス 1">
             <a:extLst>
               <a:ext uri="{FF2B5EF4-FFF2-40B4-BE49-F238E27FC236}">
-                <a16:creationId xmlns:a16="http://schemas.microsoft.com/office/drawing/2014/main" id="{4A44F366-2361-736A-2072-26070FF1A539}"/>
+                <a16:creationId xmlns:a16="http://schemas.microsoft.com/office/drawing/2014/main" id="{59113493-D767-4B98-F019-501019710B0F}"/>
               </a:ext>
             </a:extLst>
           </p:cNvPr>
@@ -4718,7 +4716,7 @@
           <p:cNvPr id="3" name="テキスト ボックス 2">
             <a:extLst>
               <a:ext uri="{FF2B5EF4-FFF2-40B4-BE49-F238E27FC236}">
-                <a16:creationId xmlns:a16="http://schemas.microsoft.com/office/drawing/2014/main" id="{B8F27D8E-DA4A-02A0-0849-10A20D9C5930}"/>
+                <a16:creationId xmlns:a16="http://schemas.microsoft.com/office/drawing/2014/main" id="{C74BF30D-D824-519D-7E7C-A9543C302438}"/>
               </a:ext>
             </a:extLst>
           </p:cNvPr>
@@ -4742,20 +4740,14 @@
           <a:lstStyle/>
           <a:p>
             <a:r>
-              <a:rPr kumimoji="1" lang="en-US" altLang="ja-JP" sz="3400" b="1">
+              <a:rPr kumimoji="1" lang="ja-JP" altLang="en-US" sz="3400" b="1">
                 <a:solidFill>
                   <a:srgbClr val="111111"/>
                 </a:solidFill>
                 <a:latin typeface="Arial" panose="020B0604020202020204" pitchFamily="34" charset="0"/>
               </a:rPr>
-              <a:t>REPOSITORY HIGHLIGHTS</a:t>
-            </a:r>
-            <a:endParaRPr kumimoji="1" lang="ja-JP" altLang="en-US" sz="3400" b="1">
-              <a:solidFill>
-                <a:srgbClr val="111111"/>
-              </a:solidFill>
-              <a:latin typeface="Arial" panose="020B0604020202020204" pitchFamily="34" charset="0"/>
-            </a:endParaRPr>
+              <a:t>リポジトリの読みどころ</a:t>
+            </a:r>
           </a:p>
         </p:txBody>
       </p:sp>
@@ -4764,7 +4756,7 @@
           <p:cNvPr id="4" name="テキスト ボックス 3">
             <a:extLst>
               <a:ext uri="{FF2B5EF4-FFF2-40B4-BE49-F238E27FC236}">
-                <a16:creationId xmlns:a16="http://schemas.microsoft.com/office/drawing/2014/main" id="{BA237847-B6AC-D233-176B-D19E5B68B38E}"/>
+                <a16:creationId xmlns:a16="http://schemas.microsoft.com/office/drawing/2014/main" id="{614A8DD0-2E95-8836-ABE2-CCDA4CAEE0C7}"/>
               </a:ext>
             </a:extLst>
           </p:cNvPr>
@@ -4774,7 +4766,7 @@
         <p:spPr>
           <a:xfrm>
             <a:off x="533400" y="3429000"/>
-            <a:ext cx="10795000" cy="400110"/>
+            <a:ext cx="10795000" cy="707886"/>
           </a:xfrm>
           <a:prstGeom prst="rect">
             <a:avLst/>
@@ -4788,13 +4780,77 @@
           <a:lstStyle/>
           <a:p>
             <a:r>
+              <a:rPr kumimoji="1" lang="ja-JP" altLang="en-US" sz="2000">
+                <a:solidFill>
+                  <a:srgbClr val="333333"/>
+                </a:solidFill>
+                <a:latin typeface="Arial" panose="020B0604020202020204" pitchFamily="34" charset="0"/>
+              </a:rPr>
+              <a:t>公開コード、</a:t>
+            </a:r>
+            <a:r>
               <a:rPr kumimoji="1" lang="en-US" altLang="ja-JP" sz="2000">
                 <a:solidFill>
                   <a:srgbClr val="333333"/>
                 </a:solidFill>
                 <a:latin typeface="Arial" panose="020B0604020202020204" pitchFamily="34" charset="0"/>
               </a:rPr>
-              <a:t>Public source code, README and commit history reveal the design decisions.</a:t>
+              <a:t>README</a:t>
+            </a:r>
+            <a:r>
+              <a:rPr kumimoji="1" lang="ja-JP" altLang="en-US" sz="2000">
+                <a:solidFill>
+                  <a:srgbClr val="333333"/>
+                </a:solidFill>
+                <a:latin typeface="Arial" panose="020B0604020202020204" pitchFamily="34" charset="0"/>
+              </a:rPr>
+              <a:t>、コミット履歴から設計判断を確認できます。
+主なファイル：</a:t>
+            </a:r>
+            <a:r>
+              <a:rPr kumimoji="1" lang="en-US" altLang="ja-JP" sz="2000">
+                <a:solidFill>
+                  <a:srgbClr val="333333"/>
+                </a:solidFill>
+                <a:latin typeface="Arial" panose="020B0604020202020204" pitchFamily="34" charset="0"/>
+              </a:rPr>
+              <a:t>README.md</a:t>
+            </a:r>
+            <a:r>
+              <a:rPr kumimoji="1" lang="ja-JP" altLang="en-US" sz="2000">
+                <a:solidFill>
+                  <a:srgbClr val="333333"/>
+                </a:solidFill>
+                <a:latin typeface="Arial" panose="020B0604020202020204" pitchFamily="34" charset="0"/>
+              </a:rPr>
+              <a:t>、</a:t>
+            </a:r>
+            <a:r>
+              <a:rPr kumimoji="1" lang="en-US" altLang="ja-JP" sz="2000">
+                <a:solidFill>
+                  <a:srgbClr val="333333"/>
+                </a:solidFill>
+                <a:latin typeface="Arial" panose="020B0604020202020204" pitchFamily="34" charset="0"/>
+              </a:rPr>
+              <a:t>app</a:t>
+            </a:r>
+            <a:r>
+              <a:rPr kumimoji="1" lang="ja-JP" altLang="en-US" sz="2000">
+                <a:solidFill>
+                  <a:srgbClr val="333333"/>
+                </a:solidFill>
+                <a:latin typeface="Arial" panose="020B0604020202020204" pitchFamily="34" charset="0"/>
+              </a:rPr>
+              <a:t>、</a:t>
+            </a:r>
+            <a:r>
+              <a:rPr kumimoji="1" lang="en-US" altLang="ja-JP" sz="2000">
+                <a:solidFill>
+                  <a:srgbClr val="333333"/>
+                </a:solidFill>
+                <a:latin typeface="Arial" panose="020B0604020202020204" pitchFamily="34" charset="0"/>
+              </a:rPr>
+              <a:t>build</a:t>
             </a:r>
             <a:endParaRPr kumimoji="1" lang="ja-JP" altLang="en-US" sz="2000">
               <a:solidFill>
@@ -4810,7 +4866,7 @@
           <p:cNvPr id="5" name="テキスト ボックス 4">
             <a:extLst>
               <a:ext uri="{FF2B5EF4-FFF2-40B4-BE49-F238E27FC236}">
-                <a16:creationId xmlns:a16="http://schemas.microsoft.com/office/drawing/2014/main" id="{6CD6D3D9-60EA-38D4-961B-17D57080EFF4}"/>
+                <a16:creationId xmlns:a16="http://schemas.microsoft.com/office/drawing/2014/main" id="{0A29BD3B-04E6-04DD-97A9-409B2691FBB5}"/>
               </a:ext>
             </a:extLst>
           </p:cNvPr>
@@ -4857,7 +4913,7 @@
             <a:hlinkClick r:id="" action="ppaction://media"/>
             <a:extLst>
               <a:ext uri="{FF2B5EF4-FFF2-40B4-BE49-F238E27FC236}">
-                <a16:creationId xmlns:a16="http://schemas.microsoft.com/office/drawing/2014/main" id="{F9E89ECF-B211-6AD4-92EC-5FB64DD4AC15}"/>
+                <a16:creationId xmlns:a16="http://schemas.microsoft.com/office/drawing/2014/main" id="{5D3D85AC-FB5E-CDB3-81BE-B93712326313}"/>
               </a:ext>
             </a:extLst>
           </p:cNvPr>
@@ -4892,7 +4948,7 @@
     </p:spTree>
     <p:extLst>
       <p:ext uri="{BB962C8B-B14F-4D97-AF65-F5344CB8AC3E}">
-        <p14:creationId xmlns:p14="http://schemas.microsoft.com/office/powerpoint/2010/main" val="2351732142"/>
+        <p14:creationId xmlns:p14="http://schemas.microsoft.com/office/powerpoint/2010/main" val="2632470948"/>
       </p:ext>
     </p:extLst>
   </p:cSld>
@@ -5016,7 +5072,7 @@
           <p:cNvPr id="2" name="テキスト ボックス 1">
             <a:extLst>
               <a:ext uri="{FF2B5EF4-FFF2-40B4-BE49-F238E27FC236}">
-                <a16:creationId xmlns:a16="http://schemas.microsoft.com/office/drawing/2014/main" id="{44FCB5C2-9430-5469-5D58-B81336C01249}"/>
+                <a16:creationId xmlns:a16="http://schemas.microsoft.com/office/drawing/2014/main" id="{4E008991-EE9F-7A02-943E-BCBB0E97D7B4}"/>
               </a:ext>
             </a:extLst>
           </p:cNvPr>
@@ -5062,7 +5118,7 @@
           <p:cNvPr id="3" name="テキスト ボックス 2">
             <a:extLst>
               <a:ext uri="{FF2B5EF4-FFF2-40B4-BE49-F238E27FC236}">
-                <a16:creationId xmlns:a16="http://schemas.microsoft.com/office/drawing/2014/main" id="{3142D6D0-5583-6C62-F24C-D10BE1579348}"/>
+                <a16:creationId xmlns:a16="http://schemas.microsoft.com/office/drawing/2014/main" id="{03CC514C-B27F-EEF0-0BD7-570BB082E7A0}"/>
               </a:ext>
             </a:extLst>
           </p:cNvPr>
@@ -5086,20 +5142,14 @@
           <a:lstStyle/>
           <a:p>
             <a:r>
-              <a:rPr kumimoji="1" lang="en-US" altLang="ja-JP" sz="3400" b="1">
+              <a:rPr kumimoji="1" lang="ja-JP" altLang="en-US" sz="3400" b="1">
                 <a:solidFill>
                   <a:srgbClr val="111111"/>
                 </a:solidFill>
                 <a:latin typeface="Arial" panose="020B0604020202020204" pitchFamily="34" charset="0"/>
               </a:rPr>
-              <a:t>ITERATIVE IMPROVEMENT</a:t>
-            </a:r>
-            <a:endParaRPr kumimoji="1" lang="ja-JP" altLang="en-US" sz="3400" b="1">
-              <a:solidFill>
-                <a:srgbClr val="111111"/>
-              </a:solidFill>
-              <a:latin typeface="Arial" panose="020B0604020202020204" pitchFamily="34" charset="0"/>
-            </a:endParaRPr>
+              <a:t>コミットから分かる改善</a:t>
+            </a:r>
           </a:p>
         </p:txBody>
       </p:sp>
@@ -5108,7 +5158,7 @@
           <p:cNvPr id="4" name="テキスト ボックス 3">
             <a:extLst>
               <a:ext uri="{FF2B5EF4-FFF2-40B4-BE49-F238E27FC236}">
-                <a16:creationId xmlns:a16="http://schemas.microsoft.com/office/drawing/2014/main" id="{43960577-5108-941B-AB03-10A6169D9072}"/>
+                <a16:creationId xmlns:a16="http://schemas.microsoft.com/office/drawing/2014/main" id="{90E7DDB7-E2DB-BE8F-A0EE-C037A2C3B884}"/>
               </a:ext>
             </a:extLst>
           </p:cNvPr>
@@ -5138,7 +5188,7 @@
                 </a:solidFill>
                 <a:latin typeface="Arial" panose="020B0604020202020204" pitchFamily="34" charset="0"/>
               </a:rPr>
-              <a:t>Small commits continuously improve features, quality and release readiness.</a:t>
+              <a:t>Add installable web app support</a:t>
             </a:r>
             <a:endParaRPr kumimoji="1" lang="ja-JP" altLang="en-US" sz="2000">
               <a:solidFill>
@@ -5154,7 +5204,7 @@
           <p:cNvPr id="5" name="テキスト ボックス 4">
             <a:extLst>
               <a:ext uri="{FF2B5EF4-FFF2-40B4-BE49-F238E27FC236}">
-                <a16:creationId xmlns:a16="http://schemas.microsoft.com/office/drawing/2014/main" id="{E66AE753-68D8-EC98-81B1-65AC2CBD63E9}"/>
+                <a16:creationId xmlns:a16="http://schemas.microsoft.com/office/drawing/2014/main" id="{2A5853B1-6165-EE11-C8D8-809842F11F10}"/>
               </a:ext>
             </a:extLst>
           </p:cNvPr>
@@ -5201,7 +5251,7 @@
             <a:hlinkClick r:id="" action="ppaction://media"/>
             <a:extLst>
               <a:ext uri="{FF2B5EF4-FFF2-40B4-BE49-F238E27FC236}">
-                <a16:creationId xmlns:a16="http://schemas.microsoft.com/office/drawing/2014/main" id="{FFE5E660-013D-0B9C-4654-E94EDE90620B}"/>
+                <a16:creationId xmlns:a16="http://schemas.microsoft.com/office/drawing/2014/main" id="{6D2E0145-883D-8C83-26E6-34DA70236D1D}"/>
               </a:ext>
             </a:extLst>
           </p:cNvPr>
@@ -5236,7 +5286,7 @@
     </p:spTree>
     <p:extLst>
       <p:ext uri="{BB962C8B-B14F-4D97-AF65-F5344CB8AC3E}">
-        <p14:creationId xmlns:p14="http://schemas.microsoft.com/office/powerpoint/2010/main" val="3644481144"/>
+        <p14:creationId xmlns:p14="http://schemas.microsoft.com/office/powerpoint/2010/main" val="2447826152"/>
       </p:ext>
     </p:extLst>
   </p:cSld>
@@ -5360,7 +5410,7 @@
           <p:cNvPr id="2" name="テキスト ボックス 1">
             <a:extLst>
               <a:ext uri="{FF2B5EF4-FFF2-40B4-BE49-F238E27FC236}">
-                <a16:creationId xmlns:a16="http://schemas.microsoft.com/office/drawing/2014/main" id="{3B62B1EB-71C1-8A8B-D386-E10AB3C847B0}"/>
+                <a16:creationId xmlns:a16="http://schemas.microsoft.com/office/drawing/2014/main" id="{87B07049-D3B1-10BB-EC3F-D3D66320F096}"/>
               </a:ext>
             </a:extLst>
           </p:cNvPr>
@@ -5406,7 +5456,7 @@
           <p:cNvPr id="3" name="テキスト ボックス 2">
             <a:extLst>
               <a:ext uri="{FF2B5EF4-FFF2-40B4-BE49-F238E27FC236}">
-                <a16:creationId xmlns:a16="http://schemas.microsoft.com/office/drawing/2014/main" id="{E19C487F-28F4-D87E-27F4-1927E6F78DB8}"/>
+                <a16:creationId xmlns:a16="http://schemas.microsoft.com/office/drawing/2014/main" id="{E8A0BE3D-00F3-9CAD-2150-6DEAD746D962}"/>
               </a:ext>
             </a:extLst>
           </p:cNvPr>
@@ -5430,20 +5480,14 @@
           <a:lstStyle/>
           <a:p>
             <a:r>
-              <a:rPr kumimoji="1" lang="en-US" altLang="ja-JP" sz="3400" b="1">
+              <a:rPr kumimoji="1" lang="ja-JP" altLang="en-US" sz="3400" b="1">
                 <a:solidFill>
                   <a:srgbClr val="111111"/>
                 </a:solidFill>
                 <a:latin typeface="Arial" panose="020B0604020202020204" pitchFamily="34" charset="0"/>
               </a:rPr>
-              <a:t>READ THE FULL ARTICLE</a:t>
-            </a:r>
-            <a:endParaRPr kumimoji="1" lang="ja-JP" altLang="en-US" sz="3400" b="1">
-              <a:solidFill>
-                <a:srgbClr val="111111"/>
-              </a:solidFill>
-              <a:latin typeface="Arial" panose="020B0604020202020204" pitchFamily="34" charset="0"/>
-            </a:endParaRPr>
+              <a:t>詳しくは積み上げログへ</a:t>
+            </a:r>
           </a:p>
         </p:txBody>
       </p:sp>
@@ -5452,7 +5496,7 @@
           <p:cNvPr id="4" name="テキスト ボックス 3">
             <a:extLst>
               <a:ext uri="{FF2B5EF4-FFF2-40B4-BE49-F238E27FC236}">
-                <a16:creationId xmlns:a16="http://schemas.microsoft.com/office/drawing/2014/main" id="{31E742CC-98A6-213A-B647-F51AEE4CFF87}"/>
+                <a16:creationId xmlns:a16="http://schemas.microsoft.com/office/drawing/2014/main" id="{A3B22FA7-B478-0AE2-4DA1-A6679A5ABF1C}"/>
               </a:ext>
             </a:extLst>
           </p:cNvPr>
@@ -5476,14 +5520,32 @@
           <a:lstStyle/>
           <a:p>
             <a:r>
-              <a:rPr kumimoji="1" lang="sv-SE" altLang="ja-JP" sz="2000">
+              <a:rPr kumimoji="1" lang="zh-TW" altLang="en-US" sz="2000">
+                <a:solidFill>
+                  <a:srgbClr val="333333"/>
+                </a:solidFill>
+                <a:latin typeface="Arial" panose="020B0604020202020204" pitchFamily="34" charset="0"/>
+              </a:rPr>
+              <a:t>記事： </a:t>
+            </a:r>
+            <a:r>
+              <a:rPr kumimoji="1" lang="en-US" altLang="zh-TW" sz="2000">
                 <a:solidFill>
                   <a:srgbClr val="333333"/>
                 </a:solidFill>
                 <a:latin typeface="Arial" panose="020B0604020202020204" pitchFamily="34" charset="0"/>
               </a:rPr>
               <a:t>https://syunnjack.dev/articles/retro-new-games
-TSUMIAGE LOG</a:t>
+</a:t>
+            </a:r>
+            <a:r>
+              <a:rPr kumimoji="1" lang="zh-TW" altLang="en-US" sz="2000">
+                <a:solidFill>
+                  <a:srgbClr val="333333"/>
+                </a:solidFill>
+                <a:latin typeface="Arial" panose="020B0604020202020204" pitchFamily="34" charset="0"/>
+              </a:rPr>
+              <a:t>学び、作り、振り返る開発記録。</a:t>
             </a:r>
             <a:endParaRPr kumimoji="1" lang="ja-JP" altLang="en-US" sz="2000">
               <a:solidFill>
@@ -5499,7 +5561,7 @@
           <p:cNvPr id="5" name="テキスト ボックス 4">
             <a:extLst>
               <a:ext uri="{FF2B5EF4-FFF2-40B4-BE49-F238E27FC236}">
-                <a16:creationId xmlns:a16="http://schemas.microsoft.com/office/drawing/2014/main" id="{F1F843C4-1B45-D086-6214-3724554D3D92}"/>
+                <a16:creationId xmlns:a16="http://schemas.microsoft.com/office/drawing/2014/main" id="{D12CE134-A03C-968F-93A7-D1D401BA03B2}"/>
               </a:ext>
             </a:extLst>
           </p:cNvPr>
@@ -5546,7 +5608,7 @@
             <a:hlinkClick r:id="" action="ppaction://media"/>
             <a:extLst>
               <a:ext uri="{FF2B5EF4-FFF2-40B4-BE49-F238E27FC236}">
-                <a16:creationId xmlns:a16="http://schemas.microsoft.com/office/drawing/2014/main" id="{83D92158-D018-69C9-110C-2ED2A1AC8D55}"/>
+                <a16:creationId xmlns:a16="http://schemas.microsoft.com/office/drawing/2014/main" id="{021BA9F1-DC80-DD0A-058B-EB30ED8A7A86}"/>
               </a:ext>
             </a:extLst>
           </p:cNvPr>
@@ -5581,7 +5643,7 @@
     </p:spTree>
     <p:extLst>
       <p:ext uri="{BB962C8B-B14F-4D97-AF65-F5344CB8AC3E}">
-        <p14:creationId xmlns:p14="http://schemas.microsoft.com/office/powerpoint/2010/main" val="2685592638"/>
+        <p14:creationId xmlns:p14="http://schemas.microsoft.com/office/powerpoint/2010/main" val="690297282"/>
       </p:ext>
     </p:extLst>
   </p:cSld>

--- a/public/videos/repositories/retro-new-games/retro-new-games-tech-preview.pptx
+++ b/public/videos/repositories/retro-new-games/retro-new-games-tech-preview.pptx
@@ -134,7 +134,7 @@
           <p:cNvPr id="2" name="タイトル 1">
             <a:extLst>
               <a:ext uri="{FF2B5EF4-FFF2-40B4-BE49-F238E27FC236}">
-                <a16:creationId xmlns:a16="http://schemas.microsoft.com/office/drawing/2014/main" id="{F3336962-E500-A196-200E-EC7E1BB17770}"/>
+                <a16:creationId xmlns:a16="http://schemas.microsoft.com/office/drawing/2014/main" id="{16031558-F229-C37E-19FB-338F09C5D96C}"/>
               </a:ext>
             </a:extLst>
           </p:cNvPr>
@@ -171,7 +171,7 @@
           <p:cNvPr id="3" name="字幕 2">
             <a:extLst>
               <a:ext uri="{FF2B5EF4-FFF2-40B4-BE49-F238E27FC236}">
-                <a16:creationId xmlns:a16="http://schemas.microsoft.com/office/drawing/2014/main" id="{24954447-F8CA-0F74-2CD2-984FAFC78D29}"/>
+                <a16:creationId xmlns:a16="http://schemas.microsoft.com/office/drawing/2014/main" id="{78969C2C-AC95-7FBC-4149-CAE944BFBB09}"/>
               </a:ext>
             </a:extLst>
           </p:cNvPr>
@@ -241,7 +241,7 @@
           <p:cNvPr id="4" name="日付プレースホルダー 3">
             <a:extLst>
               <a:ext uri="{FF2B5EF4-FFF2-40B4-BE49-F238E27FC236}">
-                <a16:creationId xmlns:a16="http://schemas.microsoft.com/office/drawing/2014/main" id="{DD5782CF-DC6B-6624-F616-29AD7F753716}"/>
+                <a16:creationId xmlns:a16="http://schemas.microsoft.com/office/drawing/2014/main" id="{F0555AF1-CE91-46B3-EAAB-0C9225C95507}"/>
               </a:ext>
             </a:extLst>
           </p:cNvPr>
@@ -257,7 +257,7 @@
           <a:bodyPr/>
           <a:lstStyle/>
           <a:p>
-            <a:fld id="{F4A6FCA5-62B8-4C15-9D32-6B3F5DFC80E5}" type="datetimeFigureOut">
+            <a:fld id="{FE205809-4741-4517-B72D-180422062302}" type="datetimeFigureOut">
               <a:rPr kumimoji="1" lang="ja-JP" altLang="en-US" smtClean="0"/>
               <a:t>2026/7/30</a:t>
             </a:fld>
@@ -270,7 +270,7 @@
           <p:cNvPr id="5" name="フッター プレースホルダー 4">
             <a:extLst>
               <a:ext uri="{FF2B5EF4-FFF2-40B4-BE49-F238E27FC236}">
-                <a16:creationId xmlns:a16="http://schemas.microsoft.com/office/drawing/2014/main" id="{A5AFA818-3F2D-2FAA-A04B-AF1B4FF34541}"/>
+                <a16:creationId xmlns:a16="http://schemas.microsoft.com/office/drawing/2014/main" id="{B459F60E-726D-54F7-84AD-E3E366299C6E}"/>
               </a:ext>
             </a:extLst>
           </p:cNvPr>
@@ -295,7 +295,7 @@
           <p:cNvPr id="6" name="スライド番号プレースホルダー 5">
             <a:extLst>
               <a:ext uri="{FF2B5EF4-FFF2-40B4-BE49-F238E27FC236}">
-                <a16:creationId xmlns:a16="http://schemas.microsoft.com/office/drawing/2014/main" id="{25B2F278-F04D-068A-AFC3-472523AAA0AA}"/>
+                <a16:creationId xmlns:a16="http://schemas.microsoft.com/office/drawing/2014/main" id="{1B94F67F-0FA4-39AE-33E9-00E65B8E4F6B}"/>
               </a:ext>
             </a:extLst>
           </p:cNvPr>
@@ -311,7 +311,7 @@
           <a:bodyPr/>
           <a:lstStyle/>
           <a:p>
-            <a:fld id="{A096E928-4380-45D7-850F-B5D9F1E18264}" type="slidenum">
+            <a:fld id="{4DBCD158-B129-4B38-9519-E3135B79286F}" type="slidenum">
               <a:rPr kumimoji="1" lang="ja-JP" altLang="en-US" smtClean="0"/>
               <a:t>‹#›</a:t>
             </a:fld>
@@ -322,7 +322,7 @@
     </p:spTree>
     <p:extLst>
       <p:ext uri="{BB962C8B-B14F-4D97-AF65-F5344CB8AC3E}">
-        <p14:creationId xmlns:p14="http://schemas.microsoft.com/office/powerpoint/2010/main" val="2425956508"/>
+        <p14:creationId xmlns:p14="http://schemas.microsoft.com/office/powerpoint/2010/main" val="1318494143"/>
       </p:ext>
     </p:extLst>
   </p:cSld>
@@ -354,7 +354,7 @@
           <p:cNvPr id="2" name="タイトル 1">
             <a:extLst>
               <a:ext uri="{FF2B5EF4-FFF2-40B4-BE49-F238E27FC236}">
-                <a16:creationId xmlns:a16="http://schemas.microsoft.com/office/drawing/2014/main" id="{7670AA0E-4C3F-A70E-EEE5-55CB1AF84B0C}"/>
+                <a16:creationId xmlns:a16="http://schemas.microsoft.com/office/drawing/2014/main" id="{09C8ECA9-17CD-06D3-5F0F-1093D0C8193A}"/>
               </a:ext>
             </a:extLst>
           </p:cNvPr>
@@ -382,7 +382,7 @@
           <p:cNvPr id="3" name="縦書きテキスト プレースホルダー 2">
             <a:extLst>
               <a:ext uri="{FF2B5EF4-FFF2-40B4-BE49-F238E27FC236}">
-                <a16:creationId xmlns:a16="http://schemas.microsoft.com/office/drawing/2014/main" id="{C4AC5F3C-6B74-DFD7-BB7B-9AE9CC811319}"/>
+                <a16:creationId xmlns:a16="http://schemas.microsoft.com/office/drawing/2014/main" id="{950D7A1B-0779-C7CE-D135-3FBEC118094F}"/>
               </a:ext>
             </a:extLst>
           </p:cNvPr>
@@ -471,7 +471,7 @@
           <p:cNvPr id="4" name="日付プレースホルダー 3">
             <a:extLst>
               <a:ext uri="{FF2B5EF4-FFF2-40B4-BE49-F238E27FC236}">
-                <a16:creationId xmlns:a16="http://schemas.microsoft.com/office/drawing/2014/main" id="{6B7F0839-FA1C-8EA5-5874-21DBE7BA1EAA}"/>
+                <a16:creationId xmlns:a16="http://schemas.microsoft.com/office/drawing/2014/main" id="{F79B2B7F-46C8-88E8-FC79-8BAF270C1BD9}"/>
               </a:ext>
             </a:extLst>
           </p:cNvPr>
@@ -487,7 +487,7 @@
           <a:bodyPr/>
           <a:lstStyle/>
           <a:p>
-            <a:fld id="{F4A6FCA5-62B8-4C15-9D32-6B3F5DFC80E5}" type="datetimeFigureOut">
+            <a:fld id="{FE205809-4741-4517-B72D-180422062302}" type="datetimeFigureOut">
               <a:rPr kumimoji="1" lang="ja-JP" altLang="en-US" smtClean="0"/>
               <a:t>2026/7/30</a:t>
             </a:fld>
@@ -500,7 +500,7 @@
           <p:cNvPr id="5" name="フッター プレースホルダー 4">
             <a:extLst>
               <a:ext uri="{FF2B5EF4-FFF2-40B4-BE49-F238E27FC236}">
-                <a16:creationId xmlns:a16="http://schemas.microsoft.com/office/drawing/2014/main" id="{C0AFF0CD-9B74-EAA5-E28F-EECD9FB31A81}"/>
+                <a16:creationId xmlns:a16="http://schemas.microsoft.com/office/drawing/2014/main" id="{EB994654-3E2A-364C-112D-9969D865A0D7}"/>
               </a:ext>
             </a:extLst>
           </p:cNvPr>
@@ -525,7 +525,7 @@
           <p:cNvPr id="6" name="スライド番号プレースホルダー 5">
             <a:extLst>
               <a:ext uri="{FF2B5EF4-FFF2-40B4-BE49-F238E27FC236}">
-                <a16:creationId xmlns:a16="http://schemas.microsoft.com/office/drawing/2014/main" id="{2A8542E1-CD60-52C8-12AE-B1614D98C964}"/>
+                <a16:creationId xmlns:a16="http://schemas.microsoft.com/office/drawing/2014/main" id="{C541C6EE-4D2E-54A0-1876-D6B416DA9BA2}"/>
               </a:ext>
             </a:extLst>
           </p:cNvPr>
@@ -541,7 +541,7 @@
           <a:bodyPr/>
           <a:lstStyle/>
           <a:p>
-            <a:fld id="{A096E928-4380-45D7-850F-B5D9F1E18264}" type="slidenum">
+            <a:fld id="{4DBCD158-B129-4B38-9519-E3135B79286F}" type="slidenum">
               <a:rPr kumimoji="1" lang="ja-JP" altLang="en-US" smtClean="0"/>
               <a:t>‹#›</a:t>
             </a:fld>
@@ -552,7 +552,7 @@
     </p:spTree>
     <p:extLst>
       <p:ext uri="{BB962C8B-B14F-4D97-AF65-F5344CB8AC3E}">
-        <p14:creationId xmlns:p14="http://schemas.microsoft.com/office/powerpoint/2010/main" val="2538297500"/>
+        <p14:creationId xmlns:p14="http://schemas.microsoft.com/office/powerpoint/2010/main" val="3845683597"/>
       </p:ext>
     </p:extLst>
   </p:cSld>
@@ -584,7 +584,7 @@
           <p:cNvPr id="2" name="縦書きタイトル 1">
             <a:extLst>
               <a:ext uri="{FF2B5EF4-FFF2-40B4-BE49-F238E27FC236}">
-                <a16:creationId xmlns:a16="http://schemas.microsoft.com/office/drawing/2014/main" id="{2EEA9500-ECE6-BEB7-0E92-85E226CC8086}"/>
+                <a16:creationId xmlns:a16="http://schemas.microsoft.com/office/drawing/2014/main" id="{28C974BE-826F-D25A-E38A-0374818D7A48}"/>
               </a:ext>
             </a:extLst>
           </p:cNvPr>
@@ -617,7 +617,7 @@
           <p:cNvPr id="3" name="縦書きテキスト プレースホルダー 2">
             <a:extLst>
               <a:ext uri="{FF2B5EF4-FFF2-40B4-BE49-F238E27FC236}">
-                <a16:creationId xmlns:a16="http://schemas.microsoft.com/office/drawing/2014/main" id="{BF1E0BE4-EC95-512E-63FF-AA7EE96377DF}"/>
+                <a16:creationId xmlns:a16="http://schemas.microsoft.com/office/drawing/2014/main" id="{AF643397-E0D9-D442-CDD6-6F09C3E4766A}"/>
               </a:ext>
             </a:extLst>
           </p:cNvPr>
@@ -711,7 +711,7 @@
           <p:cNvPr id="4" name="日付プレースホルダー 3">
             <a:extLst>
               <a:ext uri="{FF2B5EF4-FFF2-40B4-BE49-F238E27FC236}">
-                <a16:creationId xmlns:a16="http://schemas.microsoft.com/office/drawing/2014/main" id="{91524E6A-1354-29D4-0742-E66844E2AF53}"/>
+                <a16:creationId xmlns:a16="http://schemas.microsoft.com/office/drawing/2014/main" id="{4AD35A87-C17B-3C39-233B-784D964BC0A5}"/>
               </a:ext>
             </a:extLst>
           </p:cNvPr>
@@ -727,7 +727,7 @@
           <a:bodyPr/>
           <a:lstStyle/>
           <a:p>
-            <a:fld id="{F4A6FCA5-62B8-4C15-9D32-6B3F5DFC80E5}" type="datetimeFigureOut">
+            <a:fld id="{FE205809-4741-4517-B72D-180422062302}" type="datetimeFigureOut">
               <a:rPr kumimoji="1" lang="ja-JP" altLang="en-US" smtClean="0"/>
               <a:t>2026/7/30</a:t>
             </a:fld>
@@ -740,7 +740,7 @@
           <p:cNvPr id="5" name="フッター プレースホルダー 4">
             <a:extLst>
               <a:ext uri="{FF2B5EF4-FFF2-40B4-BE49-F238E27FC236}">
-                <a16:creationId xmlns:a16="http://schemas.microsoft.com/office/drawing/2014/main" id="{416AA559-BBE1-99CD-9518-CE52D9088E05}"/>
+                <a16:creationId xmlns:a16="http://schemas.microsoft.com/office/drawing/2014/main" id="{7006B768-DB9C-7A8B-3784-4B7472E18ADC}"/>
               </a:ext>
             </a:extLst>
           </p:cNvPr>
@@ -765,7 +765,7 @@
           <p:cNvPr id="6" name="スライド番号プレースホルダー 5">
             <a:extLst>
               <a:ext uri="{FF2B5EF4-FFF2-40B4-BE49-F238E27FC236}">
-                <a16:creationId xmlns:a16="http://schemas.microsoft.com/office/drawing/2014/main" id="{56C6429B-34F7-F43D-A648-4FA9281DB6ED}"/>
+                <a16:creationId xmlns:a16="http://schemas.microsoft.com/office/drawing/2014/main" id="{41CA9C7E-750F-A7E1-1B80-3379FF0EC056}"/>
               </a:ext>
             </a:extLst>
           </p:cNvPr>
@@ -781,7 +781,7 @@
           <a:bodyPr/>
           <a:lstStyle/>
           <a:p>
-            <a:fld id="{A096E928-4380-45D7-850F-B5D9F1E18264}" type="slidenum">
+            <a:fld id="{4DBCD158-B129-4B38-9519-E3135B79286F}" type="slidenum">
               <a:rPr kumimoji="1" lang="ja-JP" altLang="en-US" smtClean="0"/>
               <a:t>‹#›</a:t>
             </a:fld>
@@ -792,7 +792,7 @@
     </p:spTree>
     <p:extLst>
       <p:ext uri="{BB962C8B-B14F-4D97-AF65-F5344CB8AC3E}">
-        <p14:creationId xmlns:p14="http://schemas.microsoft.com/office/powerpoint/2010/main" val="1163801883"/>
+        <p14:creationId xmlns:p14="http://schemas.microsoft.com/office/powerpoint/2010/main" val="3454835972"/>
       </p:ext>
     </p:extLst>
   </p:cSld>
@@ -824,7 +824,7 @@
           <p:cNvPr id="2" name="タイトル 1">
             <a:extLst>
               <a:ext uri="{FF2B5EF4-FFF2-40B4-BE49-F238E27FC236}">
-                <a16:creationId xmlns:a16="http://schemas.microsoft.com/office/drawing/2014/main" id="{21390F2F-CAF8-9ECC-3E0D-7DB461DE668C}"/>
+                <a16:creationId xmlns:a16="http://schemas.microsoft.com/office/drawing/2014/main" id="{BEE93404-89F1-CFEC-FE2E-2625362C42E2}"/>
               </a:ext>
             </a:extLst>
           </p:cNvPr>
@@ -852,7 +852,7 @@
           <p:cNvPr id="3" name="コンテンツ プレースホルダー 2">
             <a:extLst>
               <a:ext uri="{FF2B5EF4-FFF2-40B4-BE49-F238E27FC236}">
-                <a16:creationId xmlns:a16="http://schemas.microsoft.com/office/drawing/2014/main" id="{829E348B-12A3-90CB-10DF-8E64011F29BA}"/>
+                <a16:creationId xmlns:a16="http://schemas.microsoft.com/office/drawing/2014/main" id="{285B2690-E26E-98DA-6476-767F8A8D251B}"/>
               </a:ext>
             </a:extLst>
           </p:cNvPr>
@@ -941,7 +941,7 @@
           <p:cNvPr id="4" name="日付プレースホルダー 3">
             <a:extLst>
               <a:ext uri="{FF2B5EF4-FFF2-40B4-BE49-F238E27FC236}">
-                <a16:creationId xmlns:a16="http://schemas.microsoft.com/office/drawing/2014/main" id="{7012505D-1408-4C40-09D0-72EAF58284B7}"/>
+                <a16:creationId xmlns:a16="http://schemas.microsoft.com/office/drawing/2014/main" id="{413AEE37-2CF3-9B0B-25EB-7E4EC4F76FA3}"/>
               </a:ext>
             </a:extLst>
           </p:cNvPr>
@@ -957,7 +957,7 @@
           <a:bodyPr/>
           <a:lstStyle/>
           <a:p>
-            <a:fld id="{F4A6FCA5-62B8-4C15-9D32-6B3F5DFC80E5}" type="datetimeFigureOut">
+            <a:fld id="{FE205809-4741-4517-B72D-180422062302}" type="datetimeFigureOut">
               <a:rPr kumimoji="1" lang="ja-JP" altLang="en-US" smtClean="0"/>
               <a:t>2026/7/30</a:t>
             </a:fld>
@@ -970,7 +970,7 @@
           <p:cNvPr id="5" name="フッター プレースホルダー 4">
             <a:extLst>
               <a:ext uri="{FF2B5EF4-FFF2-40B4-BE49-F238E27FC236}">
-                <a16:creationId xmlns:a16="http://schemas.microsoft.com/office/drawing/2014/main" id="{771F23B1-DC88-B8E7-E5DA-670ECCF168AB}"/>
+                <a16:creationId xmlns:a16="http://schemas.microsoft.com/office/drawing/2014/main" id="{E64C9FCD-C90E-D0EA-0045-E4CED4F4B67D}"/>
               </a:ext>
             </a:extLst>
           </p:cNvPr>
@@ -995,7 +995,7 @@
           <p:cNvPr id="6" name="スライド番号プレースホルダー 5">
             <a:extLst>
               <a:ext uri="{FF2B5EF4-FFF2-40B4-BE49-F238E27FC236}">
-                <a16:creationId xmlns:a16="http://schemas.microsoft.com/office/drawing/2014/main" id="{9C8C588A-1990-8115-325E-2EAE28166955}"/>
+                <a16:creationId xmlns:a16="http://schemas.microsoft.com/office/drawing/2014/main" id="{903C013C-C636-77B6-5FA4-1810D661AC90}"/>
               </a:ext>
             </a:extLst>
           </p:cNvPr>
@@ -1011,7 +1011,7 @@
           <a:bodyPr/>
           <a:lstStyle/>
           <a:p>
-            <a:fld id="{A096E928-4380-45D7-850F-B5D9F1E18264}" type="slidenum">
+            <a:fld id="{4DBCD158-B129-4B38-9519-E3135B79286F}" type="slidenum">
               <a:rPr kumimoji="1" lang="ja-JP" altLang="en-US" smtClean="0"/>
               <a:t>‹#›</a:t>
             </a:fld>
@@ -1022,7 +1022,7 @@
     </p:spTree>
     <p:extLst>
       <p:ext uri="{BB962C8B-B14F-4D97-AF65-F5344CB8AC3E}">
-        <p14:creationId xmlns:p14="http://schemas.microsoft.com/office/powerpoint/2010/main" val="1192361832"/>
+        <p14:creationId xmlns:p14="http://schemas.microsoft.com/office/powerpoint/2010/main" val="1572938799"/>
       </p:ext>
     </p:extLst>
   </p:cSld>
@@ -1054,7 +1054,7 @@
           <p:cNvPr id="2" name="タイトル 1">
             <a:extLst>
               <a:ext uri="{FF2B5EF4-FFF2-40B4-BE49-F238E27FC236}">
-                <a16:creationId xmlns:a16="http://schemas.microsoft.com/office/drawing/2014/main" id="{7E42EF2B-ED40-AF81-11FE-DEE3C79F0658}"/>
+                <a16:creationId xmlns:a16="http://schemas.microsoft.com/office/drawing/2014/main" id="{3B4287D6-BA71-0FBB-DDEA-EB612288F3F4}"/>
               </a:ext>
             </a:extLst>
           </p:cNvPr>
@@ -1091,7 +1091,7 @@
           <p:cNvPr id="3" name="テキスト プレースホルダー 2">
             <a:extLst>
               <a:ext uri="{FF2B5EF4-FFF2-40B4-BE49-F238E27FC236}">
-                <a16:creationId xmlns:a16="http://schemas.microsoft.com/office/drawing/2014/main" id="{DE7A04EE-22F2-05AE-FB86-B24A48FF5861}"/>
+                <a16:creationId xmlns:a16="http://schemas.microsoft.com/office/drawing/2014/main" id="{10B5BFE9-1DA9-6CAB-B84E-6D64135CD3FE}"/>
               </a:ext>
             </a:extLst>
           </p:cNvPr>
@@ -1216,7 +1216,7 @@
           <p:cNvPr id="4" name="日付プレースホルダー 3">
             <a:extLst>
               <a:ext uri="{FF2B5EF4-FFF2-40B4-BE49-F238E27FC236}">
-                <a16:creationId xmlns:a16="http://schemas.microsoft.com/office/drawing/2014/main" id="{5E83DA3B-EAED-2218-22C5-9214CC786DE3}"/>
+                <a16:creationId xmlns:a16="http://schemas.microsoft.com/office/drawing/2014/main" id="{FF12CBF6-104E-585B-7322-5BDC252A2882}"/>
               </a:ext>
             </a:extLst>
           </p:cNvPr>
@@ -1232,7 +1232,7 @@
           <a:bodyPr/>
           <a:lstStyle/>
           <a:p>
-            <a:fld id="{F4A6FCA5-62B8-4C15-9D32-6B3F5DFC80E5}" type="datetimeFigureOut">
+            <a:fld id="{FE205809-4741-4517-B72D-180422062302}" type="datetimeFigureOut">
               <a:rPr kumimoji="1" lang="ja-JP" altLang="en-US" smtClean="0"/>
               <a:t>2026/7/30</a:t>
             </a:fld>
@@ -1245,7 +1245,7 @@
           <p:cNvPr id="5" name="フッター プレースホルダー 4">
             <a:extLst>
               <a:ext uri="{FF2B5EF4-FFF2-40B4-BE49-F238E27FC236}">
-                <a16:creationId xmlns:a16="http://schemas.microsoft.com/office/drawing/2014/main" id="{74AFE962-C0A0-4CEE-2355-704A338080AF}"/>
+                <a16:creationId xmlns:a16="http://schemas.microsoft.com/office/drawing/2014/main" id="{A3943A6C-65EE-C3CF-4075-1678094BCD3E}"/>
               </a:ext>
             </a:extLst>
           </p:cNvPr>
@@ -1270,7 +1270,7 @@
           <p:cNvPr id="6" name="スライド番号プレースホルダー 5">
             <a:extLst>
               <a:ext uri="{FF2B5EF4-FFF2-40B4-BE49-F238E27FC236}">
-                <a16:creationId xmlns:a16="http://schemas.microsoft.com/office/drawing/2014/main" id="{ADB130A8-81DE-2B05-3A14-242A9DE37A33}"/>
+                <a16:creationId xmlns:a16="http://schemas.microsoft.com/office/drawing/2014/main" id="{841BDDA5-7C3C-C8F6-F864-2F3B777C7F47}"/>
               </a:ext>
             </a:extLst>
           </p:cNvPr>
@@ -1286,7 +1286,7 @@
           <a:bodyPr/>
           <a:lstStyle/>
           <a:p>
-            <a:fld id="{A096E928-4380-45D7-850F-B5D9F1E18264}" type="slidenum">
+            <a:fld id="{4DBCD158-B129-4B38-9519-E3135B79286F}" type="slidenum">
               <a:rPr kumimoji="1" lang="ja-JP" altLang="en-US" smtClean="0"/>
               <a:t>‹#›</a:t>
             </a:fld>
@@ -1297,7 +1297,7 @@
     </p:spTree>
     <p:extLst>
       <p:ext uri="{BB962C8B-B14F-4D97-AF65-F5344CB8AC3E}">
-        <p14:creationId xmlns:p14="http://schemas.microsoft.com/office/powerpoint/2010/main" val="3095001460"/>
+        <p14:creationId xmlns:p14="http://schemas.microsoft.com/office/powerpoint/2010/main" val="2070749536"/>
       </p:ext>
     </p:extLst>
   </p:cSld>
@@ -1329,7 +1329,7 @@
           <p:cNvPr id="2" name="タイトル 1">
             <a:extLst>
               <a:ext uri="{FF2B5EF4-FFF2-40B4-BE49-F238E27FC236}">
-                <a16:creationId xmlns:a16="http://schemas.microsoft.com/office/drawing/2014/main" id="{18B85953-7B5A-4E4E-B3ED-6865519125CC}"/>
+                <a16:creationId xmlns:a16="http://schemas.microsoft.com/office/drawing/2014/main" id="{8DB5B84C-1C71-8738-F378-F3DE11BB14D2}"/>
               </a:ext>
             </a:extLst>
           </p:cNvPr>
@@ -1357,7 +1357,7 @@
           <p:cNvPr id="3" name="コンテンツ プレースホルダー 2">
             <a:extLst>
               <a:ext uri="{FF2B5EF4-FFF2-40B4-BE49-F238E27FC236}">
-                <a16:creationId xmlns:a16="http://schemas.microsoft.com/office/drawing/2014/main" id="{9D5A811A-4FF8-A973-0A11-691C02E5F590}"/>
+                <a16:creationId xmlns:a16="http://schemas.microsoft.com/office/drawing/2014/main" id="{432553A1-8EF9-FD73-4630-454BF2AAFD1D}"/>
               </a:ext>
             </a:extLst>
           </p:cNvPr>
@@ -1451,7 +1451,7 @@
           <p:cNvPr id="4" name="コンテンツ プレースホルダー 3">
             <a:extLst>
               <a:ext uri="{FF2B5EF4-FFF2-40B4-BE49-F238E27FC236}">
-                <a16:creationId xmlns:a16="http://schemas.microsoft.com/office/drawing/2014/main" id="{C87C375D-FF60-D7CB-D215-D96E610FD378}"/>
+                <a16:creationId xmlns:a16="http://schemas.microsoft.com/office/drawing/2014/main" id="{621BDBB9-8228-D3AE-E2D0-564FF74C0DE4}"/>
               </a:ext>
             </a:extLst>
           </p:cNvPr>
@@ -1545,7 +1545,7 @@
           <p:cNvPr id="5" name="日付プレースホルダー 4">
             <a:extLst>
               <a:ext uri="{FF2B5EF4-FFF2-40B4-BE49-F238E27FC236}">
-                <a16:creationId xmlns:a16="http://schemas.microsoft.com/office/drawing/2014/main" id="{7B76AFFE-3B35-047A-3D9C-A7071D70A9E6}"/>
+                <a16:creationId xmlns:a16="http://schemas.microsoft.com/office/drawing/2014/main" id="{142502D3-11AA-E187-EB58-A3C6521F4DDF}"/>
               </a:ext>
             </a:extLst>
           </p:cNvPr>
@@ -1561,7 +1561,7 @@
           <a:bodyPr/>
           <a:lstStyle/>
           <a:p>
-            <a:fld id="{F4A6FCA5-62B8-4C15-9D32-6B3F5DFC80E5}" type="datetimeFigureOut">
+            <a:fld id="{FE205809-4741-4517-B72D-180422062302}" type="datetimeFigureOut">
               <a:rPr kumimoji="1" lang="ja-JP" altLang="en-US" smtClean="0"/>
               <a:t>2026/7/30</a:t>
             </a:fld>
@@ -1574,7 +1574,7 @@
           <p:cNvPr id="6" name="フッター プレースホルダー 5">
             <a:extLst>
               <a:ext uri="{FF2B5EF4-FFF2-40B4-BE49-F238E27FC236}">
-                <a16:creationId xmlns:a16="http://schemas.microsoft.com/office/drawing/2014/main" id="{4B04FD92-F6DA-1575-4EFF-FAD4BEEB6AA0}"/>
+                <a16:creationId xmlns:a16="http://schemas.microsoft.com/office/drawing/2014/main" id="{29E3DA60-7AFE-3676-02F0-1E9CD9481B5F}"/>
               </a:ext>
             </a:extLst>
           </p:cNvPr>
@@ -1599,7 +1599,7 @@
           <p:cNvPr id="7" name="スライド番号プレースホルダー 6">
             <a:extLst>
               <a:ext uri="{FF2B5EF4-FFF2-40B4-BE49-F238E27FC236}">
-                <a16:creationId xmlns:a16="http://schemas.microsoft.com/office/drawing/2014/main" id="{4D423773-0CF5-B794-69E1-6E111B638F57}"/>
+                <a16:creationId xmlns:a16="http://schemas.microsoft.com/office/drawing/2014/main" id="{3BB66873-7CA7-2B5F-86D1-6A6B16842FB1}"/>
               </a:ext>
             </a:extLst>
           </p:cNvPr>
@@ -1615,7 +1615,7 @@
           <a:bodyPr/>
           <a:lstStyle/>
           <a:p>
-            <a:fld id="{A096E928-4380-45D7-850F-B5D9F1E18264}" type="slidenum">
+            <a:fld id="{4DBCD158-B129-4B38-9519-E3135B79286F}" type="slidenum">
               <a:rPr kumimoji="1" lang="ja-JP" altLang="en-US" smtClean="0"/>
               <a:t>‹#›</a:t>
             </a:fld>
@@ -1626,7 +1626,7 @@
     </p:spTree>
     <p:extLst>
       <p:ext uri="{BB962C8B-B14F-4D97-AF65-F5344CB8AC3E}">
-        <p14:creationId xmlns:p14="http://schemas.microsoft.com/office/powerpoint/2010/main" val="3691235660"/>
+        <p14:creationId xmlns:p14="http://schemas.microsoft.com/office/powerpoint/2010/main" val="1913644596"/>
       </p:ext>
     </p:extLst>
   </p:cSld>
@@ -1658,7 +1658,7 @@
           <p:cNvPr id="2" name="タイトル 1">
             <a:extLst>
               <a:ext uri="{FF2B5EF4-FFF2-40B4-BE49-F238E27FC236}">
-                <a16:creationId xmlns:a16="http://schemas.microsoft.com/office/drawing/2014/main" id="{D176948F-3294-17C1-9F25-5EDA57DA8A99}"/>
+                <a16:creationId xmlns:a16="http://schemas.microsoft.com/office/drawing/2014/main" id="{0A9BB8D6-C1F5-A520-0FBA-86A34FED53C5}"/>
               </a:ext>
             </a:extLst>
           </p:cNvPr>
@@ -1691,7 +1691,7 @@
           <p:cNvPr id="3" name="テキスト プレースホルダー 2">
             <a:extLst>
               <a:ext uri="{FF2B5EF4-FFF2-40B4-BE49-F238E27FC236}">
-                <a16:creationId xmlns:a16="http://schemas.microsoft.com/office/drawing/2014/main" id="{86ABD5D9-A650-78D5-2BB8-5988DBEC0CDE}"/>
+                <a16:creationId xmlns:a16="http://schemas.microsoft.com/office/drawing/2014/main" id="{E1FE7E9E-5BC4-617A-D75B-EBDEC1F13AA3}"/>
               </a:ext>
             </a:extLst>
           </p:cNvPr>
@@ -1762,7 +1762,7 @@
           <p:cNvPr id="4" name="コンテンツ プレースホルダー 3">
             <a:extLst>
               <a:ext uri="{FF2B5EF4-FFF2-40B4-BE49-F238E27FC236}">
-                <a16:creationId xmlns:a16="http://schemas.microsoft.com/office/drawing/2014/main" id="{97611D30-3A04-78F9-2156-5248396D4E5F}"/>
+                <a16:creationId xmlns:a16="http://schemas.microsoft.com/office/drawing/2014/main" id="{6E1E395B-5C3D-C7B8-6DFA-155AAE349484}"/>
               </a:ext>
             </a:extLst>
           </p:cNvPr>
@@ -1856,7 +1856,7 @@
           <p:cNvPr id="5" name="テキスト プレースホルダー 4">
             <a:extLst>
               <a:ext uri="{FF2B5EF4-FFF2-40B4-BE49-F238E27FC236}">
-                <a16:creationId xmlns:a16="http://schemas.microsoft.com/office/drawing/2014/main" id="{A2120E48-D5EA-E6F5-9241-511ABDC221F1}"/>
+                <a16:creationId xmlns:a16="http://schemas.microsoft.com/office/drawing/2014/main" id="{314009DE-4C47-E621-C0F5-3E587CE1F764}"/>
               </a:ext>
             </a:extLst>
           </p:cNvPr>
@@ -1927,7 +1927,7 @@
           <p:cNvPr id="6" name="コンテンツ プレースホルダー 5">
             <a:extLst>
               <a:ext uri="{FF2B5EF4-FFF2-40B4-BE49-F238E27FC236}">
-                <a16:creationId xmlns:a16="http://schemas.microsoft.com/office/drawing/2014/main" id="{E7AA702F-D9AE-BAC4-B8C0-EBADA622DD08}"/>
+                <a16:creationId xmlns:a16="http://schemas.microsoft.com/office/drawing/2014/main" id="{9912EE43-7EF3-0652-7F78-ADED8165B27C}"/>
               </a:ext>
             </a:extLst>
           </p:cNvPr>
@@ -2021,7 +2021,7 @@
           <p:cNvPr id="7" name="日付プレースホルダー 6">
             <a:extLst>
               <a:ext uri="{FF2B5EF4-FFF2-40B4-BE49-F238E27FC236}">
-                <a16:creationId xmlns:a16="http://schemas.microsoft.com/office/drawing/2014/main" id="{EDB3F828-5F9E-86A7-9B05-25A6733F8D76}"/>
+                <a16:creationId xmlns:a16="http://schemas.microsoft.com/office/drawing/2014/main" id="{7CDFC404-FD44-F27C-CCA9-5CBBDEF563A8}"/>
               </a:ext>
             </a:extLst>
           </p:cNvPr>
@@ -2037,7 +2037,7 @@
           <a:bodyPr/>
           <a:lstStyle/>
           <a:p>
-            <a:fld id="{F4A6FCA5-62B8-4C15-9D32-6B3F5DFC80E5}" type="datetimeFigureOut">
+            <a:fld id="{FE205809-4741-4517-B72D-180422062302}" type="datetimeFigureOut">
               <a:rPr kumimoji="1" lang="ja-JP" altLang="en-US" smtClean="0"/>
               <a:t>2026/7/30</a:t>
             </a:fld>
@@ -2050,7 +2050,7 @@
           <p:cNvPr id="8" name="フッター プレースホルダー 7">
             <a:extLst>
               <a:ext uri="{FF2B5EF4-FFF2-40B4-BE49-F238E27FC236}">
-                <a16:creationId xmlns:a16="http://schemas.microsoft.com/office/drawing/2014/main" id="{0E79C2B5-07BA-AB62-515B-5DE3E3508034}"/>
+                <a16:creationId xmlns:a16="http://schemas.microsoft.com/office/drawing/2014/main" id="{05E0486E-0B0F-AF53-D489-92A896137171}"/>
               </a:ext>
             </a:extLst>
           </p:cNvPr>
@@ -2075,7 +2075,7 @@
           <p:cNvPr id="9" name="スライド番号プレースホルダー 8">
             <a:extLst>
               <a:ext uri="{FF2B5EF4-FFF2-40B4-BE49-F238E27FC236}">
-                <a16:creationId xmlns:a16="http://schemas.microsoft.com/office/drawing/2014/main" id="{4E6D63FE-DDA0-0E09-373F-84DBD164DE71}"/>
+                <a16:creationId xmlns:a16="http://schemas.microsoft.com/office/drawing/2014/main" id="{1935005F-7CC4-E763-F64B-F2B149F24CD1}"/>
               </a:ext>
             </a:extLst>
           </p:cNvPr>
@@ -2091,7 +2091,7 @@
           <a:bodyPr/>
           <a:lstStyle/>
           <a:p>
-            <a:fld id="{A096E928-4380-45D7-850F-B5D9F1E18264}" type="slidenum">
+            <a:fld id="{4DBCD158-B129-4B38-9519-E3135B79286F}" type="slidenum">
               <a:rPr kumimoji="1" lang="ja-JP" altLang="en-US" smtClean="0"/>
               <a:t>‹#›</a:t>
             </a:fld>
@@ -2102,7 +2102,7 @@
     </p:spTree>
     <p:extLst>
       <p:ext uri="{BB962C8B-B14F-4D97-AF65-F5344CB8AC3E}">
-        <p14:creationId xmlns:p14="http://schemas.microsoft.com/office/powerpoint/2010/main" val="1684599642"/>
+        <p14:creationId xmlns:p14="http://schemas.microsoft.com/office/powerpoint/2010/main" val="2170235720"/>
       </p:ext>
     </p:extLst>
   </p:cSld>
@@ -2134,7 +2134,7 @@
           <p:cNvPr id="2" name="タイトル 1">
             <a:extLst>
               <a:ext uri="{FF2B5EF4-FFF2-40B4-BE49-F238E27FC236}">
-                <a16:creationId xmlns:a16="http://schemas.microsoft.com/office/drawing/2014/main" id="{A8C86808-EF0B-A7B1-315F-23A515ABD799}"/>
+                <a16:creationId xmlns:a16="http://schemas.microsoft.com/office/drawing/2014/main" id="{515669C7-7B33-71D9-D440-F53D707028C8}"/>
               </a:ext>
             </a:extLst>
           </p:cNvPr>
@@ -2162,7 +2162,7 @@
           <p:cNvPr id="3" name="日付プレースホルダー 2">
             <a:extLst>
               <a:ext uri="{FF2B5EF4-FFF2-40B4-BE49-F238E27FC236}">
-                <a16:creationId xmlns:a16="http://schemas.microsoft.com/office/drawing/2014/main" id="{82687BE4-D02D-E97F-0B7B-8E563AD37BC5}"/>
+                <a16:creationId xmlns:a16="http://schemas.microsoft.com/office/drawing/2014/main" id="{A4461D47-D890-1EE3-6E76-CBF6913CA6F9}"/>
               </a:ext>
             </a:extLst>
           </p:cNvPr>
@@ -2178,7 +2178,7 @@
           <a:bodyPr/>
           <a:lstStyle/>
           <a:p>
-            <a:fld id="{F4A6FCA5-62B8-4C15-9D32-6B3F5DFC80E5}" type="datetimeFigureOut">
+            <a:fld id="{FE205809-4741-4517-B72D-180422062302}" type="datetimeFigureOut">
               <a:rPr kumimoji="1" lang="ja-JP" altLang="en-US" smtClean="0"/>
               <a:t>2026/7/30</a:t>
             </a:fld>
@@ -2191,7 +2191,7 @@
           <p:cNvPr id="4" name="フッター プレースホルダー 3">
             <a:extLst>
               <a:ext uri="{FF2B5EF4-FFF2-40B4-BE49-F238E27FC236}">
-                <a16:creationId xmlns:a16="http://schemas.microsoft.com/office/drawing/2014/main" id="{516A6BC7-1A57-4927-EC97-B5B4725720A7}"/>
+                <a16:creationId xmlns:a16="http://schemas.microsoft.com/office/drawing/2014/main" id="{A704E3BE-780A-7BC1-D30E-E5C7B3664980}"/>
               </a:ext>
             </a:extLst>
           </p:cNvPr>
@@ -2216,7 +2216,7 @@
           <p:cNvPr id="5" name="スライド番号プレースホルダー 4">
             <a:extLst>
               <a:ext uri="{FF2B5EF4-FFF2-40B4-BE49-F238E27FC236}">
-                <a16:creationId xmlns:a16="http://schemas.microsoft.com/office/drawing/2014/main" id="{62B739E7-0C4D-35E7-44A3-44BF29976FA0}"/>
+                <a16:creationId xmlns:a16="http://schemas.microsoft.com/office/drawing/2014/main" id="{02AC0861-B0E2-F933-F642-D4FFE6D8E4C9}"/>
               </a:ext>
             </a:extLst>
           </p:cNvPr>
@@ -2232,7 +2232,7 @@
           <a:bodyPr/>
           <a:lstStyle/>
           <a:p>
-            <a:fld id="{A096E928-4380-45D7-850F-B5D9F1E18264}" type="slidenum">
+            <a:fld id="{4DBCD158-B129-4B38-9519-E3135B79286F}" type="slidenum">
               <a:rPr kumimoji="1" lang="ja-JP" altLang="en-US" smtClean="0"/>
               <a:t>‹#›</a:t>
             </a:fld>
@@ -2243,7 +2243,7 @@
     </p:spTree>
     <p:extLst>
       <p:ext uri="{BB962C8B-B14F-4D97-AF65-F5344CB8AC3E}">
-        <p14:creationId xmlns:p14="http://schemas.microsoft.com/office/powerpoint/2010/main" val="2635087248"/>
+        <p14:creationId xmlns:p14="http://schemas.microsoft.com/office/powerpoint/2010/main" val="398267109"/>
       </p:ext>
     </p:extLst>
   </p:cSld>
@@ -2275,7 +2275,7 @@
           <p:cNvPr id="2" name="日付プレースホルダー 1">
             <a:extLst>
               <a:ext uri="{FF2B5EF4-FFF2-40B4-BE49-F238E27FC236}">
-                <a16:creationId xmlns:a16="http://schemas.microsoft.com/office/drawing/2014/main" id="{12E9279A-1D64-B57F-79EB-3DE409DEF8A9}"/>
+                <a16:creationId xmlns:a16="http://schemas.microsoft.com/office/drawing/2014/main" id="{93D243F8-AF82-D0EB-035C-2F27F4118376}"/>
               </a:ext>
             </a:extLst>
           </p:cNvPr>
@@ -2291,7 +2291,7 @@
           <a:bodyPr/>
           <a:lstStyle/>
           <a:p>
-            <a:fld id="{F4A6FCA5-62B8-4C15-9D32-6B3F5DFC80E5}" type="datetimeFigureOut">
+            <a:fld id="{FE205809-4741-4517-B72D-180422062302}" type="datetimeFigureOut">
               <a:rPr kumimoji="1" lang="ja-JP" altLang="en-US" smtClean="0"/>
               <a:t>2026/7/30</a:t>
             </a:fld>
@@ -2304,7 +2304,7 @@
           <p:cNvPr id="3" name="フッター プレースホルダー 2">
             <a:extLst>
               <a:ext uri="{FF2B5EF4-FFF2-40B4-BE49-F238E27FC236}">
-                <a16:creationId xmlns:a16="http://schemas.microsoft.com/office/drawing/2014/main" id="{1F561D11-2530-562F-BAE2-15C422ECD8F2}"/>
+                <a16:creationId xmlns:a16="http://schemas.microsoft.com/office/drawing/2014/main" id="{A217570E-BE2F-D43B-B32C-1B40BA36FC6E}"/>
               </a:ext>
             </a:extLst>
           </p:cNvPr>
@@ -2329,7 +2329,7 @@
           <p:cNvPr id="4" name="スライド番号プレースホルダー 3">
             <a:extLst>
               <a:ext uri="{FF2B5EF4-FFF2-40B4-BE49-F238E27FC236}">
-                <a16:creationId xmlns:a16="http://schemas.microsoft.com/office/drawing/2014/main" id="{88A6A739-C3ED-F219-C9CF-33A1E3FCBAAF}"/>
+                <a16:creationId xmlns:a16="http://schemas.microsoft.com/office/drawing/2014/main" id="{AE6B5A43-CFCE-F6A8-5EFD-57886FFAD3B4}"/>
               </a:ext>
             </a:extLst>
           </p:cNvPr>
@@ -2345,7 +2345,7 @@
           <a:bodyPr/>
           <a:lstStyle/>
           <a:p>
-            <a:fld id="{A096E928-4380-45D7-850F-B5D9F1E18264}" type="slidenum">
+            <a:fld id="{4DBCD158-B129-4B38-9519-E3135B79286F}" type="slidenum">
               <a:rPr kumimoji="1" lang="ja-JP" altLang="en-US" smtClean="0"/>
               <a:t>‹#›</a:t>
             </a:fld>
@@ -2356,7 +2356,7 @@
     </p:spTree>
     <p:extLst>
       <p:ext uri="{BB962C8B-B14F-4D97-AF65-F5344CB8AC3E}">
-        <p14:creationId xmlns:p14="http://schemas.microsoft.com/office/powerpoint/2010/main" val="2068870090"/>
+        <p14:creationId xmlns:p14="http://schemas.microsoft.com/office/powerpoint/2010/main" val="2479663659"/>
       </p:ext>
     </p:extLst>
   </p:cSld>
@@ -2388,7 +2388,7 @@
           <p:cNvPr id="2" name="タイトル 1">
             <a:extLst>
               <a:ext uri="{FF2B5EF4-FFF2-40B4-BE49-F238E27FC236}">
-                <a16:creationId xmlns:a16="http://schemas.microsoft.com/office/drawing/2014/main" id="{97FC8661-B8D5-8759-EA6E-0D6E82D0DA0B}"/>
+                <a16:creationId xmlns:a16="http://schemas.microsoft.com/office/drawing/2014/main" id="{819A69C1-CCCF-8099-088E-717F875C382D}"/>
               </a:ext>
             </a:extLst>
           </p:cNvPr>
@@ -2425,7 +2425,7 @@
           <p:cNvPr id="3" name="コンテンツ プレースホルダー 2">
             <a:extLst>
               <a:ext uri="{FF2B5EF4-FFF2-40B4-BE49-F238E27FC236}">
-                <a16:creationId xmlns:a16="http://schemas.microsoft.com/office/drawing/2014/main" id="{3DDD8E64-01E0-C69C-C298-81AF5CB01963}"/>
+                <a16:creationId xmlns:a16="http://schemas.microsoft.com/office/drawing/2014/main" id="{32BF2F36-4A9F-5D82-9020-41913D83AC04}"/>
               </a:ext>
             </a:extLst>
           </p:cNvPr>
@@ -2547,7 +2547,7 @@
           <p:cNvPr id="4" name="テキスト プレースホルダー 3">
             <a:extLst>
               <a:ext uri="{FF2B5EF4-FFF2-40B4-BE49-F238E27FC236}">
-                <a16:creationId xmlns:a16="http://schemas.microsoft.com/office/drawing/2014/main" id="{071D9EA0-08B9-2765-77FA-B023D7F15758}"/>
+                <a16:creationId xmlns:a16="http://schemas.microsoft.com/office/drawing/2014/main" id="{654CE223-9959-0CFC-C8FC-F723C5011342}"/>
               </a:ext>
             </a:extLst>
           </p:cNvPr>
@@ -2618,7 +2618,7 @@
           <p:cNvPr id="5" name="日付プレースホルダー 4">
             <a:extLst>
               <a:ext uri="{FF2B5EF4-FFF2-40B4-BE49-F238E27FC236}">
-                <a16:creationId xmlns:a16="http://schemas.microsoft.com/office/drawing/2014/main" id="{7E4C8A83-5956-BF68-F3B6-3A2044C0360B}"/>
+                <a16:creationId xmlns:a16="http://schemas.microsoft.com/office/drawing/2014/main" id="{AC82396A-FB60-5F18-C46F-5015A98902F7}"/>
               </a:ext>
             </a:extLst>
           </p:cNvPr>
@@ -2634,7 +2634,7 @@
           <a:bodyPr/>
           <a:lstStyle/>
           <a:p>
-            <a:fld id="{F4A6FCA5-62B8-4C15-9D32-6B3F5DFC80E5}" type="datetimeFigureOut">
+            <a:fld id="{FE205809-4741-4517-B72D-180422062302}" type="datetimeFigureOut">
               <a:rPr kumimoji="1" lang="ja-JP" altLang="en-US" smtClean="0"/>
               <a:t>2026/7/30</a:t>
             </a:fld>
@@ -2647,7 +2647,7 @@
           <p:cNvPr id="6" name="フッター プレースホルダー 5">
             <a:extLst>
               <a:ext uri="{FF2B5EF4-FFF2-40B4-BE49-F238E27FC236}">
-                <a16:creationId xmlns:a16="http://schemas.microsoft.com/office/drawing/2014/main" id="{5DE6BD21-34FC-51BF-6BD6-F21276F326C3}"/>
+                <a16:creationId xmlns:a16="http://schemas.microsoft.com/office/drawing/2014/main" id="{91615B2B-BE05-108B-C8A1-0581E5E29CA7}"/>
               </a:ext>
             </a:extLst>
           </p:cNvPr>
@@ -2672,7 +2672,7 @@
           <p:cNvPr id="7" name="スライド番号プレースホルダー 6">
             <a:extLst>
               <a:ext uri="{FF2B5EF4-FFF2-40B4-BE49-F238E27FC236}">
-                <a16:creationId xmlns:a16="http://schemas.microsoft.com/office/drawing/2014/main" id="{D9A1AD90-8DCE-2D65-7E56-C93721FA4AD8}"/>
+                <a16:creationId xmlns:a16="http://schemas.microsoft.com/office/drawing/2014/main" id="{0D1FCE83-C671-F88A-0C92-76B5E515EC87}"/>
               </a:ext>
             </a:extLst>
           </p:cNvPr>
@@ -2688,7 +2688,7 @@
           <a:bodyPr/>
           <a:lstStyle/>
           <a:p>
-            <a:fld id="{A096E928-4380-45D7-850F-B5D9F1E18264}" type="slidenum">
+            <a:fld id="{4DBCD158-B129-4B38-9519-E3135B79286F}" type="slidenum">
               <a:rPr kumimoji="1" lang="ja-JP" altLang="en-US" smtClean="0"/>
               <a:t>‹#›</a:t>
             </a:fld>
@@ -2699,7 +2699,7 @@
     </p:spTree>
     <p:extLst>
       <p:ext uri="{BB962C8B-B14F-4D97-AF65-F5344CB8AC3E}">
-        <p14:creationId xmlns:p14="http://schemas.microsoft.com/office/powerpoint/2010/main" val="4243687742"/>
+        <p14:creationId xmlns:p14="http://schemas.microsoft.com/office/powerpoint/2010/main" val="1557507214"/>
       </p:ext>
     </p:extLst>
   </p:cSld>
@@ -2731,7 +2731,7 @@
           <p:cNvPr id="2" name="タイトル 1">
             <a:extLst>
               <a:ext uri="{FF2B5EF4-FFF2-40B4-BE49-F238E27FC236}">
-                <a16:creationId xmlns:a16="http://schemas.microsoft.com/office/drawing/2014/main" id="{6CF4064E-7DC5-3DB6-81B0-CF07A2C05963}"/>
+                <a16:creationId xmlns:a16="http://schemas.microsoft.com/office/drawing/2014/main" id="{B27B46B6-6D84-AAC8-4A35-8301713B0DD2}"/>
               </a:ext>
             </a:extLst>
           </p:cNvPr>
@@ -2768,7 +2768,7 @@
           <p:cNvPr id="3" name="図プレースホルダー 2">
             <a:extLst>
               <a:ext uri="{FF2B5EF4-FFF2-40B4-BE49-F238E27FC236}">
-                <a16:creationId xmlns:a16="http://schemas.microsoft.com/office/drawing/2014/main" id="{CB603894-08A4-BDC9-770F-D877752D6329}"/>
+                <a16:creationId xmlns:a16="http://schemas.microsoft.com/office/drawing/2014/main" id="{661CEA01-5C09-420F-09F3-8C02540A9E03}"/>
               </a:ext>
             </a:extLst>
           </p:cNvPr>
@@ -2835,7 +2835,7 @@
           <p:cNvPr id="4" name="テキスト プレースホルダー 3">
             <a:extLst>
               <a:ext uri="{FF2B5EF4-FFF2-40B4-BE49-F238E27FC236}">
-                <a16:creationId xmlns:a16="http://schemas.microsoft.com/office/drawing/2014/main" id="{8F15C764-0C36-1661-906F-0F7C34400437}"/>
+                <a16:creationId xmlns:a16="http://schemas.microsoft.com/office/drawing/2014/main" id="{D0BE0B8C-09D9-118A-F9D8-39F875E5B1A5}"/>
               </a:ext>
             </a:extLst>
           </p:cNvPr>
@@ -2906,7 +2906,7 @@
           <p:cNvPr id="5" name="日付プレースホルダー 4">
             <a:extLst>
               <a:ext uri="{FF2B5EF4-FFF2-40B4-BE49-F238E27FC236}">
-                <a16:creationId xmlns:a16="http://schemas.microsoft.com/office/drawing/2014/main" id="{CC75E92A-5A76-8C82-5AC9-59793E13E13E}"/>
+                <a16:creationId xmlns:a16="http://schemas.microsoft.com/office/drawing/2014/main" id="{98491AD3-0E72-2BF7-65E9-50A3BB2B2ECE}"/>
               </a:ext>
             </a:extLst>
           </p:cNvPr>
@@ -2922,7 +2922,7 @@
           <a:bodyPr/>
           <a:lstStyle/>
           <a:p>
-            <a:fld id="{F4A6FCA5-62B8-4C15-9D32-6B3F5DFC80E5}" type="datetimeFigureOut">
+            <a:fld id="{FE205809-4741-4517-B72D-180422062302}" type="datetimeFigureOut">
               <a:rPr kumimoji="1" lang="ja-JP" altLang="en-US" smtClean="0"/>
               <a:t>2026/7/30</a:t>
             </a:fld>
@@ -2935,7 +2935,7 @@
           <p:cNvPr id="6" name="フッター プレースホルダー 5">
             <a:extLst>
               <a:ext uri="{FF2B5EF4-FFF2-40B4-BE49-F238E27FC236}">
-                <a16:creationId xmlns:a16="http://schemas.microsoft.com/office/drawing/2014/main" id="{EEBD9A15-D1F8-C902-C101-F79A031715A9}"/>
+                <a16:creationId xmlns:a16="http://schemas.microsoft.com/office/drawing/2014/main" id="{F45BD404-E3D8-C898-539E-494E83C42B74}"/>
               </a:ext>
             </a:extLst>
           </p:cNvPr>
@@ -2960,7 +2960,7 @@
           <p:cNvPr id="7" name="スライド番号プレースホルダー 6">
             <a:extLst>
               <a:ext uri="{FF2B5EF4-FFF2-40B4-BE49-F238E27FC236}">
-                <a16:creationId xmlns:a16="http://schemas.microsoft.com/office/drawing/2014/main" id="{C0D44BCF-BC27-3F29-0A35-B392EFE97B35}"/>
+                <a16:creationId xmlns:a16="http://schemas.microsoft.com/office/drawing/2014/main" id="{01CAD7CF-C8C7-5B70-F18F-8D73D226216D}"/>
               </a:ext>
             </a:extLst>
           </p:cNvPr>
@@ -2976,7 +2976,7 @@
           <a:bodyPr/>
           <a:lstStyle/>
           <a:p>
-            <a:fld id="{A096E928-4380-45D7-850F-B5D9F1E18264}" type="slidenum">
+            <a:fld id="{4DBCD158-B129-4B38-9519-E3135B79286F}" type="slidenum">
               <a:rPr kumimoji="1" lang="ja-JP" altLang="en-US" smtClean="0"/>
               <a:t>‹#›</a:t>
             </a:fld>
@@ -2987,7 +2987,7 @@
     </p:spTree>
     <p:extLst>
       <p:ext uri="{BB962C8B-B14F-4D97-AF65-F5344CB8AC3E}">
-        <p14:creationId xmlns:p14="http://schemas.microsoft.com/office/powerpoint/2010/main" val="372128959"/>
+        <p14:creationId xmlns:p14="http://schemas.microsoft.com/office/powerpoint/2010/main" val="2907529120"/>
       </p:ext>
     </p:extLst>
   </p:cSld>
@@ -3024,7 +3024,7 @@
           <p:cNvPr id="2" name="タイトル プレースホルダー 1">
             <a:extLst>
               <a:ext uri="{FF2B5EF4-FFF2-40B4-BE49-F238E27FC236}">
-                <a16:creationId xmlns:a16="http://schemas.microsoft.com/office/drawing/2014/main" id="{EB0F2DD7-FE44-BBF2-7A37-C008B5E24AE2}"/>
+                <a16:creationId xmlns:a16="http://schemas.microsoft.com/office/drawing/2014/main" id="{2889BE82-700B-6C10-B9BB-F5F3EDB36868}"/>
               </a:ext>
             </a:extLst>
           </p:cNvPr>
@@ -3062,7 +3062,7 @@
           <p:cNvPr id="3" name="テキスト プレースホルダー 2">
             <a:extLst>
               <a:ext uri="{FF2B5EF4-FFF2-40B4-BE49-F238E27FC236}">
-                <a16:creationId xmlns:a16="http://schemas.microsoft.com/office/drawing/2014/main" id="{3B9E6C77-36B8-0F9B-4F25-3F333548E6E3}"/>
+                <a16:creationId xmlns:a16="http://schemas.microsoft.com/office/drawing/2014/main" id="{4C03B84E-ABED-DDDE-70A3-F88D45DBDAA3}"/>
               </a:ext>
             </a:extLst>
           </p:cNvPr>
@@ -3161,7 +3161,7 @@
           <p:cNvPr id="4" name="日付プレースホルダー 3">
             <a:extLst>
               <a:ext uri="{FF2B5EF4-FFF2-40B4-BE49-F238E27FC236}">
-                <a16:creationId xmlns:a16="http://schemas.microsoft.com/office/drawing/2014/main" id="{921CD8F6-966B-BF86-529C-472A2FD040E6}"/>
+                <a16:creationId xmlns:a16="http://schemas.microsoft.com/office/drawing/2014/main" id="{0019DE58-8D29-67BC-CAFB-D004E55C14DC}"/>
               </a:ext>
             </a:extLst>
           </p:cNvPr>
@@ -3195,7 +3195,7 @@
             </a:lvl1pPr>
           </a:lstStyle>
           <a:p>
-            <a:fld id="{F4A6FCA5-62B8-4C15-9D32-6B3F5DFC80E5}" type="datetimeFigureOut">
+            <a:fld id="{FE205809-4741-4517-B72D-180422062302}" type="datetimeFigureOut">
               <a:rPr kumimoji="1" lang="ja-JP" altLang="en-US" smtClean="0"/>
               <a:t>2026/7/30</a:t>
             </a:fld>
@@ -3208,7 +3208,7 @@
           <p:cNvPr id="5" name="フッター プレースホルダー 4">
             <a:extLst>
               <a:ext uri="{FF2B5EF4-FFF2-40B4-BE49-F238E27FC236}">
-                <a16:creationId xmlns:a16="http://schemas.microsoft.com/office/drawing/2014/main" id="{BB108AED-4D2D-8DDD-49E3-878EF8BBA6A5}"/>
+                <a16:creationId xmlns:a16="http://schemas.microsoft.com/office/drawing/2014/main" id="{5E1422E8-08BC-EB7B-E871-25834A88FFAB}"/>
               </a:ext>
             </a:extLst>
           </p:cNvPr>
@@ -3251,7 +3251,7 @@
           <p:cNvPr id="6" name="スライド番号プレースホルダー 5">
             <a:extLst>
               <a:ext uri="{FF2B5EF4-FFF2-40B4-BE49-F238E27FC236}">
-                <a16:creationId xmlns:a16="http://schemas.microsoft.com/office/drawing/2014/main" id="{4A231448-84F3-5A62-77A4-21BAFDD02AC7}"/>
+                <a16:creationId xmlns:a16="http://schemas.microsoft.com/office/drawing/2014/main" id="{A9571786-4CB8-2B8E-A067-A8F9E880762F}"/>
               </a:ext>
             </a:extLst>
           </p:cNvPr>
@@ -3285,7 +3285,7 @@
             </a:lvl1pPr>
           </a:lstStyle>
           <a:p>
-            <a:fld id="{A096E928-4380-45D7-850F-B5D9F1E18264}" type="slidenum">
+            <a:fld id="{4DBCD158-B129-4B38-9519-E3135B79286F}" type="slidenum">
               <a:rPr kumimoji="1" lang="ja-JP" altLang="en-US" smtClean="0"/>
               <a:t>‹#›</a:t>
             </a:fld>
@@ -3296,7 +3296,7 @@
     </p:spTree>
     <p:extLst>
       <p:ext uri="{BB962C8B-B14F-4D97-AF65-F5344CB8AC3E}">
-        <p14:creationId xmlns:p14="http://schemas.microsoft.com/office/powerpoint/2010/main" val="814113451"/>
+        <p14:creationId xmlns:p14="http://schemas.microsoft.com/office/powerpoint/2010/main" val="865001236"/>
       </p:ext>
     </p:extLst>
   </p:cSld>
@@ -3619,7 +3619,7 @@
           <p:cNvPr id="2" name="テキスト ボックス 1">
             <a:extLst>
               <a:ext uri="{FF2B5EF4-FFF2-40B4-BE49-F238E27FC236}">
-                <a16:creationId xmlns:a16="http://schemas.microsoft.com/office/drawing/2014/main" id="{F02E505B-B105-6214-F288-2B2352AEFCE2}"/>
+                <a16:creationId xmlns:a16="http://schemas.microsoft.com/office/drawing/2014/main" id="{C7BCAC32-44CE-7C8F-DC5E-453C23F52941}"/>
               </a:ext>
             </a:extLst>
           </p:cNvPr>
@@ -3665,7 +3665,7 @@
           <p:cNvPr id="3" name="テキスト ボックス 2">
             <a:extLst>
               <a:ext uri="{FF2B5EF4-FFF2-40B4-BE49-F238E27FC236}">
-                <a16:creationId xmlns:a16="http://schemas.microsoft.com/office/drawing/2014/main" id="{9E0D9BEA-B632-3201-3EC7-07DA0F252487}"/>
+                <a16:creationId xmlns:a16="http://schemas.microsoft.com/office/drawing/2014/main" id="{DAB91CD1-582F-DF43-B9C3-4EE4C96DE092}"/>
               </a:ext>
             </a:extLst>
           </p:cNvPr>
@@ -3714,7 +3714,7 @@
           <p:cNvPr id="4" name="テキスト ボックス 3">
             <a:extLst>
               <a:ext uri="{FF2B5EF4-FFF2-40B4-BE49-F238E27FC236}">
-                <a16:creationId xmlns:a16="http://schemas.microsoft.com/office/drawing/2014/main" id="{A7F0C822-D116-26D0-C04B-FEB95F2B27AF}"/>
+                <a16:creationId xmlns:a16="http://schemas.microsoft.com/office/drawing/2014/main" id="{BF56A740-39A7-C86F-A53F-F857DAECC0D9}"/>
               </a:ext>
             </a:extLst>
           </p:cNvPr>
@@ -3754,7 +3754,7 @@
           <p:cNvPr id="5" name="テキスト ボックス 4">
             <a:extLst>
               <a:ext uri="{FF2B5EF4-FFF2-40B4-BE49-F238E27FC236}">
-                <a16:creationId xmlns:a16="http://schemas.microsoft.com/office/drawing/2014/main" id="{86862EBC-F99A-DEEE-3CD7-FA796339FBB7}"/>
+                <a16:creationId xmlns:a16="http://schemas.microsoft.com/office/drawing/2014/main" id="{907308F8-C92A-950C-792C-AA30BF67CB71}"/>
               </a:ext>
             </a:extLst>
           </p:cNvPr>
@@ -3801,7 +3801,7 @@
             <a:hlinkClick r:id="" action="ppaction://media"/>
             <a:extLst>
               <a:ext uri="{FF2B5EF4-FFF2-40B4-BE49-F238E27FC236}">
-                <a16:creationId xmlns:a16="http://schemas.microsoft.com/office/drawing/2014/main" id="{A6FA5CAE-8B0D-3B1A-F2F5-7758E23E2560}"/>
+                <a16:creationId xmlns:a16="http://schemas.microsoft.com/office/drawing/2014/main" id="{0955CEC9-6B50-2A8E-9897-EA37CCC4E29A}"/>
               </a:ext>
             </a:extLst>
           </p:cNvPr>
@@ -3836,7 +3836,7 @@
     </p:spTree>
     <p:extLst>
       <p:ext uri="{BB962C8B-B14F-4D97-AF65-F5344CB8AC3E}">
-        <p14:creationId xmlns:p14="http://schemas.microsoft.com/office/powerpoint/2010/main" val="2890635637"/>
+        <p14:creationId xmlns:p14="http://schemas.microsoft.com/office/powerpoint/2010/main" val="931528193"/>
       </p:ext>
     </p:extLst>
   </p:cSld>
@@ -3960,7 +3960,7 @@
           <p:cNvPr id="2" name="テキスト ボックス 1">
             <a:extLst>
               <a:ext uri="{FF2B5EF4-FFF2-40B4-BE49-F238E27FC236}">
-                <a16:creationId xmlns:a16="http://schemas.microsoft.com/office/drawing/2014/main" id="{AF962B31-C32F-2BE6-CF29-409C7C7BC8FB}"/>
+                <a16:creationId xmlns:a16="http://schemas.microsoft.com/office/drawing/2014/main" id="{905F11FB-D26A-D2BE-8125-0E0E8E2BDD0D}"/>
               </a:ext>
             </a:extLst>
           </p:cNvPr>
@@ -4006,7 +4006,7 @@
           <p:cNvPr id="3" name="テキスト ボックス 2">
             <a:extLst>
               <a:ext uri="{FF2B5EF4-FFF2-40B4-BE49-F238E27FC236}">
-                <a16:creationId xmlns:a16="http://schemas.microsoft.com/office/drawing/2014/main" id="{8718DEF9-E310-E52A-2544-73D770B5AB08}"/>
+                <a16:creationId xmlns:a16="http://schemas.microsoft.com/office/drawing/2014/main" id="{8945E226-69A9-B721-0DFC-6107FCC0F38E}"/>
               </a:ext>
             </a:extLst>
           </p:cNvPr>
@@ -4046,7 +4046,7 @@
           <p:cNvPr id="4" name="テキスト ボックス 3">
             <a:extLst>
               <a:ext uri="{FF2B5EF4-FFF2-40B4-BE49-F238E27FC236}">
-                <a16:creationId xmlns:a16="http://schemas.microsoft.com/office/drawing/2014/main" id="{CBD26CF5-0C73-9745-2A40-A9ECBE3B7225}"/>
+                <a16:creationId xmlns:a16="http://schemas.microsoft.com/office/drawing/2014/main" id="{4608EC0E-D25E-914B-AD25-71555ECD91C4}"/>
               </a:ext>
             </a:extLst>
           </p:cNvPr>
@@ -4095,7 +4095,7 @@
           <p:cNvPr id="5" name="テキスト ボックス 4">
             <a:extLst>
               <a:ext uri="{FF2B5EF4-FFF2-40B4-BE49-F238E27FC236}">
-                <a16:creationId xmlns:a16="http://schemas.microsoft.com/office/drawing/2014/main" id="{8A24C759-16E5-CD36-7C93-CF6F8424BF27}"/>
+                <a16:creationId xmlns:a16="http://schemas.microsoft.com/office/drawing/2014/main" id="{ED323082-335C-67F4-EE4E-BEEBC449FD36}"/>
               </a:ext>
             </a:extLst>
           </p:cNvPr>
@@ -4142,7 +4142,7 @@
             <a:hlinkClick r:id="" action="ppaction://media"/>
             <a:extLst>
               <a:ext uri="{FF2B5EF4-FFF2-40B4-BE49-F238E27FC236}">
-                <a16:creationId xmlns:a16="http://schemas.microsoft.com/office/drawing/2014/main" id="{8E139A78-5337-220C-42E8-D242FB8141CA}"/>
+                <a16:creationId xmlns:a16="http://schemas.microsoft.com/office/drawing/2014/main" id="{89610EA2-AC38-B27F-47D0-9E85D2BC3597}"/>
               </a:ext>
             </a:extLst>
           </p:cNvPr>
@@ -4177,7 +4177,7 @@
     </p:spTree>
     <p:extLst>
       <p:ext uri="{BB962C8B-B14F-4D97-AF65-F5344CB8AC3E}">
-        <p14:creationId xmlns:p14="http://schemas.microsoft.com/office/powerpoint/2010/main" val="3927374599"/>
+        <p14:creationId xmlns:p14="http://schemas.microsoft.com/office/powerpoint/2010/main" val="3265137661"/>
       </p:ext>
     </p:extLst>
   </p:cSld>
@@ -4301,7 +4301,7 @@
           <p:cNvPr id="2" name="テキスト ボックス 1">
             <a:extLst>
               <a:ext uri="{FF2B5EF4-FFF2-40B4-BE49-F238E27FC236}">
-                <a16:creationId xmlns:a16="http://schemas.microsoft.com/office/drawing/2014/main" id="{896D06AA-E9C1-A59C-A7AD-C4736DB7A103}"/>
+                <a16:creationId xmlns:a16="http://schemas.microsoft.com/office/drawing/2014/main" id="{DDC9F29E-B0E2-89FF-9FDB-88370045AD1D}"/>
               </a:ext>
             </a:extLst>
           </p:cNvPr>
@@ -4347,7 +4347,7 @@
           <p:cNvPr id="3" name="テキスト ボックス 2">
             <a:extLst>
               <a:ext uri="{FF2B5EF4-FFF2-40B4-BE49-F238E27FC236}">
-                <a16:creationId xmlns:a16="http://schemas.microsoft.com/office/drawing/2014/main" id="{E5CBC499-B75C-4493-6849-508315FF4407}"/>
+                <a16:creationId xmlns:a16="http://schemas.microsoft.com/office/drawing/2014/main" id="{A6B7C052-0EED-BEC3-EFAB-B21303CFEA69}"/>
               </a:ext>
             </a:extLst>
           </p:cNvPr>
@@ -4387,7 +4387,7 @@
           <p:cNvPr id="4" name="テキスト ボックス 3">
             <a:extLst>
               <a:ext uri="{FF2B5EF4-FFF2-40B4-BE49-F238E27FC236}">
-                <a16:creationId xmlns:a16="http://schemas.microsoft.com/office/drawing/2014/main" id="{2D54F264-F94A-CB30-81BE-02634958B1F0}"/>
+                <a16:creationId xmlns:a16="http://schemas.microsoft.com/office/drawing/2014/main" id="{CC6FCF43-84FC-1B8F-3CFC-1554077E515C}"/>
               </a:ext>
             </a:extLst>
           </p:cNvPr>
@@ -4464,7 +4464,7 @@
           <p:cNvPr id="5" name="テキスト ボックス 4">
             <a:extLst>
               <a:ext uri="{FF2B5EF4-FFF2-40B4-BE49-F238E27FC236}">
-                <a16:creationId xmlns:a16="http://schemas.microsoft.com/office/drawing/2014/main" id="{CFAC9664-78D4-F034-344A-ED71707E91C7}"/>
+                <a16:creationId xmlns:a16="http://schemas.microsoft.com/office/drawing/2014/main" id="{CC07A3E0-E69A-DC19-D339-43490D7728BA}"/>
               </a:ext>
             </a:extLst>
           </p:cNvPr>
@@ -4511,7 +4511,7 @@
             <a:hlinkClick r:id="" action="ppaction://media"/>
             <a:extLst>
               <a:ext uri="{FF2B5EF4-FFF2-40B4-BE49-F238E27FC236}">
-                <a16:creationId xmlns:a16="http://schemas.microsoft.com/office/drawing/2014/main" id="{BD2D851C-5F75-2DA1-8542-6EB3646D4686}"/>
+                <a16:creationId xmlns:a16="http://schemas.microsoft.com/office/drawing/2014/main" id="{113E7C38-D3D5-0DC1-A671-AF24F005CBDB}"/>
               </a:ext>
             </a:extLst>
           </p:cNvPr>
@@ -4546,7 +4546,7 @@
     </p:spTree>
     <p:extLst>
       <p:ext uri="{BB962C8B-B14F-4D97-AF65-F5344CB8AC3E}">
-        <p14:creationId xmlns:p14="http://schemas.microsoft.com/office/powerpoint/2010/main" val="325268847"/>
+        <p14:creationId xmlns:p14="http://schemas.microsoft.com/office/powerpoint/2010/main" val="26269440"/>
       </p:ext>
     </p:extLst>
   </p:cSld>
@@ -4670,7 +4670,7 @@
           <p:cNvPr id="2" name="テキスト ボックス 1">
             <a:extLst>
               <a:ext uri="{FF2B5EF4-FFF2-40B4-BE49-F238E27FC236}">
-                <a16:creationId xmlns:a16="http://schemas.microsoft.com/office/drawing/2014/main" id="{59113493-D767-4B98-F019-501019710B0F}"/>
+                <a16:creationId xmlns:a16="http://schemas.microsoft.com/office/drawing/2014/main" id="{9C509833-9646-FB47-4162-031032DAA3A3}"/>
               </a:ext>
             </a:extLst>
           </p:cNvPr>
@@ -4716,7 +4716,7 @@
           <p:cNvPr id="3" name="テキスト ボックス 2">
             <a:extLst>
               <a:ext uri="{FF2B5EF4-FFF2-40B4-BE49-F238E27FC236}">
-                <a16:creationId xmlns:a16="http://schemas.microsoft.com/office/drawing/2014/main" id="{C74BF30D-D824-519D-7E7C-A9543C302438}"/>
+                <a16:creationId xmlns:a16="http://schemas.microsoft.com/office/drawing/2014/main" id="{D8E3C689-712A-E5A6-A05F-245CFCF3D2DB}"/>
               </a:ext>
             </a:extLst>
           </p:cNvPr>
@@ -4756,7 +4756,7 @@
           <p:cNvPr id="4" name="テキスト ボックス 3">
             <a:extLst>
               <a:ext uri="{FF2B5EF4-FFF2-40B4-BE49-F238E27FC236}">
-                <a16:creationId xmlns:a16="http://schemas.microsoft.com/office/drawing/2014/main" id="{614A8DD0-2E95-8836-ABE2-CCDA4CAEE0C7}"/>
+                <a16:creationId xmlns:a16="http://schemas.microsoft.com/office/drawing/2014/main" id="{A63B3DA5-A3D7-A27B-9AAE-6D88EA8CE5FA}"/>
               </a:ext>
             </a:extLst>
           </p:cNvPr>
@@ -4866,7 +4866,7 @@
           <p:cNvPr id="5" name="テキスト ボックス 4">
             <a:extLst>
               <a:ext uri="{FF2B5EF4-FFF2-40B4-BE49-F238E27FC236}">
-                <a16:creationId xmlns:a16="http://schemas.microsoft.com/office/drawing/2014/main" id="{0A29BD3B-04E6-04DD-97A9-409B2691FBB5}"/>
+                <a16:creationId xmlns:a16="http://schemas.microsoft.com/office/drawing/2014/main" id="{FD47B02A-173B-CFB0-2BEB-09B036D06787}"/>
               </a:ext>
             </a:extLst>
           </p:cNvPr>
@@ -4913,7 +4913,7 @@
             <a:hlinkClick r:id="" action="ppaction://media"/>
             <a:extLst>
               <a:ext uri="{FF2B5EF4-FFF2-40B4-BE49-F238E27FC236}">
-                <a16:creationId xmlns:a16="http://schemas.microsoft.com/office/drawing/2014/main" id="{5D3D85AC-FB5E-CDB3-81BE-B93712326313}"/>
+                <a16:creationId xmlns:a16="http://schemas.microsoft.com/office/drawing/2014/main" id="{2F898EDD-1F34-6F72-D6B6-A44D9A37BC2D}"/>
               </a:ext>
             </a:extLst>
           </p:cNvPr>
@@ -4948,7 +4948,7 @@
     </p:spTree>
     <p:extLst>
       <p:ext uri="{BB962C8B-B14F-4D97-AF65-F5344CB8AC3E}">
-        <p14:creationId xmlns:p14="http://schemas.microsoft.com/office/powerpoint/2010/main" val="2632470948"/>
+        <p14:creationId xmlns:p14="http://schemas.microsoft.com/office/powerpoint/2010/main" val="2071320878"/>
       </p:ext>
     </p:extLst>
   </p:cSld>
@@ -5072,7 +5072,7 @@
           <p:cNvPr id="2" name="テキスト ボックス 1">
             <a:extLst>
               <a:ext uri="{FF2B5EF4-FFF2-40B4-BE49-F238E27FC236}">
-                <a16:creationId xmlns:a16="http://schemas.microsoft.com/office/drawing/2014/main" id="{4E008991-EE9F-7A02-943E-BCBB0E97D7B4}"/>
+                <a16:creationId xmlns:a16="http://schemas.microsoft.com/office/drawing/2014/main" id="{0CBD1FC6-A250-D6D2-6088-15B15BA82B8E}"/>
               </a:ext>
             </a:extLst>
           </p:cNvPr>
@@ -5118,7 +5118,7 @@
           <p:cNvPr id="3" name="テキスト ボックス 2">
             <a:extLst>
               <a:ext uri="{FF2B5EF4-FFF2-40B4-BE49-F238E27FC236}">
-                <a16:creationId xmlns:a16="http://schemas.microsoft.com/office/drawing/2014/main" id="{03CC514C-B27F-EEF0-0BD7-570BB082E7A0}"/>
+                <a16:creationId xmlns:a16="http://schemas.microsoft.com/office/drawing/2014/main" id="{0667864D-16BD-FB02-5039-59514C9CA07F}"/>
               </a:ext>
             </a:extLst>
           </p:cNvPr>
@@ -5158,7 +5158,7 @@
           <p:cNvPr id="4" name="テキスト ボックス 3">
             <a:extLst>
               <a:ext uri="{FF2B5EF4-FFF2-40B4-BE49-F238E27FC236}">
-                <a16:creationId xmlns:a16="http://schemas.microsoft.com/office/drawing/2014/main" id="{90E7DDB7-E2DB-BE8F-A0EE-C037A2C3B884}"/>
+                <a16:creationId xmlns:a16="http://schemas.microsoft.com/office/drawing/2014/main" id="{83656DA0-EE39-CD0F-12FB-9E758C07F91A}"/>
               </a:ext>
             </a:extLst>
           </p:cNvPr>
@@ -5182,20 +5182,14 @@
           <a:lstStyle/>
           <a:p>
             <a:r>
-              <a:rPr kumimoji="1" lang="en-US" altLang="ja-JP" sz="2000">
+              <a:rPr kumimoji="1" lang="ja-JP" altLang="en-US" sz="2000">
                 <a:solidFill>
                   <a:srgbClr val="333333"/>
                 </a:solidFill>
                 <a:latin typeface="Arial" panose="020B0604020202020204" pitchFamily="34" charset="0"/>
               </a:rPr>
-              <a:t>Add installable web app support</a:t>
-            </a:r>
-            <a:endParaRPr kumimoji="1" lang="ja-JP" altLang="en-US" sz="2000">
-              <a:solidFill>
-                <a:srgbClr val="333333"/>
-              </a:solidFill>
-              <a:latin typeface="Arial" panose="020B0604020202020204" pitchFamily="34" charset="0"/>
-            </a:endParaRPr>
+              <a:t>直近のコミットでは、新機能の追加と実装強化が行われました。</a:t>
+            </a:r>
           </a:p>
         </p:txBody>
       </p:sp>
@@ -5204,7 +5198,7 @@
           <p:cNvPr id="5" name="テキスト ボックス 4">
             <a:extLst>
               <a:ext uri="{FF2B5EF4-FFF2-40B4-BE49-F238E27FC236}">
-                <a16:creationId xmlns:a16="http://schemas.microsoft.com/office/drawing/2014/main" id="{2A5853B1-6165-EE11-C8D8-809842F11F10}"/>
+                <a16:creationId xmlns:a16="http://schemas.microsoft.com/office/drawing/2014/main" id="{C5839F0C-515B-03F1-700F-7AB248C80C08}"/>
               </a:ext>
             </a:extLst>
           </p:cNvPr>
@@ -5251,7 +5245,7 @@
             <a:hlinkClick r:id="" action="ppaction://media"/>
             <a:extLst>
               <a:ext uri="{FF2B5EF4-FFF2-40B4-BE49-F238E27FC236}">
-                <a16:creationId xmlns:a16="http://schemas.microsoft.com/office/drawing/2014/main" id="{6D2E0145-883D-8C83-26E6-34DA70236D1D}"/>
+                <a16:creationId xmlns:a16="http://schemas.microsoft.com/office/drawing/2014/main" id="{48354D89-F2D1-CA70-2088-62DA0B4D602C}"/>
               </a:ext>
             </a:extLst>
           </p:cNvPr>
@@ -5286,7 +5280,7 @@
     </p:spTree>
     <p:extLst>
       <p:ext uri="{BB962C8B-B14F-4D97-AF65-F5344CB8AC3E}">
-        <p14:creationId xmlns:p14="http://schemas.microsoft.com/office/powerpoint/2010/main" val="2447826152"/>
+        <p14:creationId xmlns:p14="http://schemas.microsoft.com/office/powerpoint/2010/main" val="3237768738"/>
       </p:ext>
     </p:extLst>
   </p:cSld>
@@ -5295,10 +5289,10 @@
   </p:clrMapOvr>
   <mc:AlternateContent xmlns:mc="http://schemas.openxmlformats.org/markup-compatibility/2006">
     <mc:Choice xmlns:p14="http://schemas.microsoft.com/office/powerpoint/2010/main" Requires="p14">
-      <p:transition spd="slow" p14:dur="2000" advTm="7000"/>
+      <p:transition spd="slow" p14:dur="2000" advTm="6000"/>
     </mc:Choice>
     <mc:Fallback>
-      <p:transition spd="slow" advTm="7000"/>
+      <p:transition spd="slow" advTm="6000"/>
     </mc:Fallback>
   </mc:AlternateContent>
   <p:timing>
@@ -5329,7 +5323,7 @@
                                   <p:childTnLst>
                                     <p:cmd type="call" cmd="playFrom(0.0)">
                                       <p:cBhvr>
-                                        <p:cTn id="6" dur="6571" fill="hold"/>
+                                        <p:cTn id="6" dur="5687" fill="hold"/>
                                         <p:tgtEl>
                                           <p:spTgt spid="6"/>
                                         </p:tgtEl>
@@ -5410,7 +5404,7 @@
           <p:cNvPr id="2" name="テキスト ボックス 1">
             <a:extLst>
               <a:ext uri="{FF2B5EF4-FFF2-40B4-BE49-F238E27FC236}">
-                <a16:creationId xmlns:a16="http://schemas.microsoft.com/office/drawing/2014/main" id="{87B07049-D3B1-10BB-EC3F-D3D66320F096}"/>
+                <a16:creationId xmlns:a16="http://schemas.microsoft.com/office/drawing/2014/main" id="{2654BA23-F5BD-8DB7-47ED-8AC7B36664E3}"/>
               </a:ext>
             </a:extLst>
           </p:cNvPr>
@@ -5456,7 +5450,7 @@
           <p:cNvPr id="3" name="テキスト ボックス 2">
             <a:extLst>
               <a:ext uri="{FF2B5EF4-FFF2-40B4-BE49-F238E27FC236}">
-                <a16:creationId xmlns:a16="http://schemas.microsoft.com/office/drawing/2014/main" id="{E8A0BE3D-00F3-9CAD-2150-6DEAD746D962}"/>
+                <a16:creationId xmlns:a16="http://schemas.microsoft.com/office/drawing/2014/main" id="{AA8667E9-AEEA-48C1-D8D2-BA0410ED00A7}"/>
               </a:ext>
             </a:extLst>
           </p:cNvPr>
@@ -5496,7 +5490,7 @@
           <p:cNvPr id="4" name="テキスト ボックス 3">
             <a:extLst>
               <a:ext uri="{FF2B5EF4-FFF2-40B4-BE49-F238E27FC236}">
-                <a16:creationId xmlns:a16="http://schemas.microsoft.com/office/drawing/2014/main" id="{A3B22FA7-B478-0AE2-4DA1-A6679A5ABF1C}"/>
+                <a16:creationId xmlns:a16="http://schemas.microsoft.com/office/drawing/2014/main" id="{FCB61824-A83A-5B02-38E5-F1B5D5B64FCB}"/>
               </a:ext>
             </a:extLst>
           </p:cNvPr>
@@ -5561,7 +5555,7 @@
           <p:cNvPr id="5" name="テキスト ボックス 4">
             <a:extLst>
               <a:ext uri="{FF2B5EF4-FFF2-40B4-BE49-F238E27FC236}">
-                <a16:creationId xmlns:a16="http://schemas.microsoft.com/office/drawing/2014/main" id="{D12CE134-A03C-968F-93A7-D1D401BA03B2}"/>
+                <a16:creationId xmlns:a16="http://schemas.microsoft.com/office/drawing/2014/main" id="{2BFB5367-6B31-E15F-29D2-0A429581A7C0}"/>
               </a:ext>
             </a:extLst>
           </p:cNvPr>
@@ -5608,7 +5602,7 @@
             <a:hlinkClick r:id="" action="ppaction://media"/>
             <a:extLst>
               <a:ext uri="{FF2B5EF4-FFF2-40B4-BE49-F238E27FC236}">
-                <a16:creationId xmlns:a16="http://schemas.microsoft.com/office/drawing/2014/main" id="{021BA9F1-DC80-DD0A-058B-EB30ED8A7A86}"/>
+                <a16:creationId xmlns:a16="http://schemas.microsoft.com/office/drawing/2014/main" id="{39E49AE9-FC84-AAD6-181D-D7BFBA75B2B0}"/>
               </a:ext>
             </a:extLst>
           </p:cNvPr>
@@ -5643,7 +5637,7 @@
     </p:spTree>
     <p:extLst>
       <p:ext uri="{BB962C8B-B14F-4D97-AF65-F5344CB8AC3E}">
-        <p14:creationId xmlns:p14="http://schemas.microsoft.com/office/powerpoint/2010/main" val="690297282"/>
+        <p14:creationId xmlns:p14="http://schemas.microsoft.com/office/powerpoint/2010/main" val="3214570220"/>
       </p:ext>
     </p:extLst>
   </p:cSld>
